--- a/assets/diagrams/split-inference/turbovla-diagrams-editable.pptx
+++ b/assets/diagrams/split-inference/turbovla-diagrams-editable.pptx
@@ -3114,15 +3114,15 @@
           <a:p>
             <a:pPr algn="l"/>
             <a:r>
-              <a:rPr lang="zh-CN" sz="2600" b="1">
+              <a:rPr lang="zh-CN" sz="2522" b="1">
                 <a:solidFill>
                   <a:srgbClr val="111111"/>
                 </a:solidFill>
-                <a:latin typeface="Microsoft YaHei"/>
-                <a:ea typeface="Microsoft YaHei"/>
-                <a:cs typeface="Microsoft YaHei"/>
-              </a:rPr>
-              <a:t>TurboVLA 双设备拆分推理框架</a:t>
+                <a:latin typeface="Arial"/>
+                <a:ea typeface="Microsoft YaHei"/>
+                <a:cs typeface="Microsoft YaHei"/>
+              </a:rPr>
+              <a:t>TurboVLA Split-Inference Framework</a:t>
             </a:r>
             <a:endParaRPr lang="zh-CN" sz="2600"/>
           </a:p>
@@ -3155,15 +3155,15 @@
           <a:p>
             <a:pPr algn="l"/>
             <a:r>
-              <a:rPr lang="zh-CN" sz="1300">
+              <a:rPr lang="zh-CN" sz="1261">
                 <a:solidFill>
                   <a:srgbClr val="111111"/>
                 </a:solidFill>
-                <a:latin typeface="Microsoft YaHei"/>
-                <a:ea typeface="Microsoft YaHei"/>
-                <a:cs typeface="Microsoft YaHei"/>
-              </a:rPr>
-              <a:t>观测与控制留在 Orin · 全部神经网络运行于 Thor</a:t>
+                <a:latin typeface="Arial"/>
+                <a:ea typeface="Microsoft YaHei"/>
+                <a:cs typeface="Microsoft YaHei"/>
+              </a:rPr>
+              <a:t>Observations and control on Orin · Complete neural inference on Thor</a:t>
             </a:r>
             <a:endParaRPr lang="zh-CN" sz="1300"/>
           </a:p>
@@ -3196,11 +3196,11 @@
           <a:p>
             <a:pPr algn="ctr"/>
             <a:r>
-              <a:rPr lang="zh-CN" sz="1650" b="1">
+              <a:rPr lang="zh-CN" sz="1600" b="1">
                 <a:solidFill>
                   <a:srgbClr val="111111"/>
                 </a:solidFill>
-                <a:latin typeface="Microsoft YaHei"/>
+                <a:latin typeface="Arial"/>
                 <a:ea typeface="Microsoft YaHei"/>
                 <a:cs typeface="Microsoft YaHei"/>
               </a:rPr>
@@ -3237,11 +3237,11 @@
           <a:p>
             <a:pPr algn="ctr"/>
             <a:r>
-              <a:rPr lang="zh-CN" sz="1600" b="1">
+              <a:rPr lang="zh-CN" sz="1552" b="1">
                 <a:solidFill>
                   <a:srgbClr val="FFFFFF"/>
                 </a:solidFill>
-                <a:latin typeface="Microsoft YaHei"/>
+                <a:latin typeface="Arial"/>
                 <a:ea typeface="Microsoft YaHei"/>
                 <a:cs typeface="Microsoft YaHei"/>
               </a:rPr>
@@ -3278,11 +3278,11 @@
           <a:p>
             <a:pPr algn="ctr"/>
             <a:r>
-              <a:rPr lang="zh-CN" sz="1650" b="1">
+              <a:rPr lang="zh-CN" sz="1600" b="1">
                 <a:solidFill>
                   <a:srgbClr val="111111"/>
                 </a:solidFill>
-                <a:latin typeface="Microsoft YaHei"/>
+                <a:latin typeface="Arial"/>
                 <a:ea typeface="Microsoft YaHei"/>
                 <a:cs typeface="Microsoft YaHei"/>
               </a:rPr>
@@ -3319,11 +3319,11 @@
           <a:p>
             <a:pPr algn="ctr"/>
             <a:r>
-              <a:rPr lang="zh-CN" sz="1600" b="1">
+              <a:rPr lang="zh-CN" sz="1552" b="1">
                 <a:solidFill>
                   <a:srgbClr val="FFFFFF"/>
                 </a:solidFill>
-                <a:latin typeface="Microsoft YaHei"/>
+                <a:latin typeface="Arial"/>
                 <a:ea typeface="Microsoft YaHei"/>
                 <a:cs typeface="Microsoft YaHei"/>
               </a:rPr>
@@ -3360,15 +3360,15 @@
           <a:p>
             <a:pPr algn="l"/>
             <a:r>
-              <a:rPr lang="zh-CN" sz="1300" b="1">
+              <a:rPr lang="zh-CN" sz="1261" b="1">
                 <a:solidFill>
                   <a:srgbClr val="1354AA"/>
                 </a:solidFill>
-                <a:latin typeface="Microsoft YaHei"/>
-                <a:ea typeface="Microsoft YaHei"/>
-                <a:cs typeface="Microsoft YaHei"/>
-              </a:rPr>
-              <a:t>完整 TurboVLA 神经网络推理</a:t>
+                <a:latin typeface="Arial"/>
+                <a:ea typeface="Microsoft YaHei"/>
+                <a:cs typeface="Microsoft YaHei"/>
+              </a:rPr>
+              <a:t>Complete TurboVLA neural inference</a:t>
             </a:r>
             <a:endParaRPr lang="zh-CN" sz="1300"/>
           </a:p>
@@ -3401,15 +3401,15 @@
           <a:p>
             <a:pPr algn="ctr"/>
             <a:r>
-              <a:rPr lang="zh-CN" sz="1200" b="1">
+              <a:rPr lang="zh-CN" sz="892" b="1">
                 <a:solidFill>
                   <a:srgbClr val="111111"/>
                 </a:solidFill>
-                <a:latin typeface="Microsoft YaHei"/>
-                <a:ea typeface="Microsoft YaHei"/>
-                <a:cs typeface="Microsoft YaHei"/>
-              </a:rPr>
-              <a:t>LIBERO 环境</a:t>
+                <a:latin typeface="Arial"/>
+                <a:ea typeface="Microsoft YaHei"/>
+                <a:cs typeface="Microsoft YaHei"/>
+              </a:rPr>
+              <a:t>LIBERO environment</a:t>
             </a:r>
             <a:endParaRPr lang="zh-CN" sz="1200"/>
           </a:p>
@@ -3442,15 +3442,15 @@
           <a:p>
             <a:pPr algn="ctr"/>
             <a:r>
-              <a:rPr lang="zh-CN" sz="940">
+              <a:rPr lang="zh-CN" sz="800">
                 <a:solidFill>
                   <a:srgbClr val="111111"/>
                 </a:solidFill>
-                <a:latin typeface="Microsoft YaHei"/>
-                <a:ea typeface="Microsoft YaHei"/>
-                <a:cs typeface="Microsoft YaHei"/>
-              </a:rPr>
-              <a:t>双视角 RGB · 8维状态 · 语言指令</a:t>
+                <a:latin typeface="Arial"/>
+                <a:ea typeface="Microsoft YaHei"/>
+                <a:cs typeface="Microsoft YaHei"/>
+              </a:rPr>
+              <a:t>Dual-view RGB · 8-D state · Instruction</a:t>
             </a:r>
             <a:endParaRPr lang="zh-CN" sz="940"/>
           </a:p>
@@ -3483,15 +3483,15 @@
           <a:p>
             <a:pPr algn="ctr"/>
             <a:r>
-              <a:rPr lang="zh-CN" sz="1200" b="1">
+              <a:rPr lang="zh-CN" sz="1164" b="1">
                 <a:solidFill>
                   <a:srgbClr val="111111"/>
                 </a:solidFill>
-                <a:latin typeface="Microsoft YaHei"/>
-                <a:ea typeface="Microsoft YaHei"/>
-                <a:cs typeface="Microsoft YaHei"/>
-              </a:rPr>
-              <a:t>观测快照与归一化</a:t>
+                <a:latin typeface="Arial"/>
+                <a:ea typeface="Microsoft YaHei"/>
+                <a:cs typeface="Microsoft YaHei"/>
+              </a:rPr>
+              <a:t>Snapshot and normalize</a:t>
             </a:r>
             <a:endParaRPr lang="zh-CN" sz="1200"/>
           </a:p>
@@ -3524,11 +3524,11 @@
           <a:p>
             <a:pPr algn="ctr"/>
             <a:r>
-              <a:rPr lang="zh-CN" sz="1150">
+              <a:rPr lang="zh-CN" sz="1115">
                 <a:solidFill>
                   <a:srgbClr val="111111"/>
                 </a:solidFill>
-                <a:latin typeface="Microsoft YaHei"/>
+                <a:latin typeface="Arial"/>
                 <a:ea typeface="Microsoft YaHei"/>
                 <a:cs typeface="Microsoft YaHei"/>
               </a:rPr>
@@ -3565,11 +3565,11 @@
           <a:p>
             <a:pPr algn="ctr"/>
             <a:r>
-              <a:rPr lang="zh-CN" sz="1150">
+              <a:rPr lang="zh-CN" sz="1115">
                 <a:solidFill>
                   <a:srgbClr val="111111"/>
                 </a:solidFill>
-                <a:latin typeface="Microsoft YaHei"/>
+                <a:latin typeface="Arial"/>
                 <a:ea typeface="Microsoft YaHei"/>
                 <a:cs typeface="Microsoft YaHei"/>
               </a:rPr>
@@ -3606,15 +3606,15 @@
           <a:p>
             <a:pPr algn="ctr"/>
             <a:r>
-              <a:rPr lang="zh-CN" sz="1200" b="1">
+              <a:rPr lang="zh-CN" sz="1132" b="1">
                 <a:solidFill>
                   <a:srgbClr val="111111"/>
                 </a:solidFill>
-                <a:latin typeface="Microsoft YaHei"/>
-                <a:ea typeface="Microsoft YaHei"/>
-                <a:cs typeface="Microsoft YaHei"/>
-              </a:rPr>
-              <a:t>张量编码与无损压缩</a:t>
+                <a:latin typeface="Arial"/>
+                <a:ea typeface="Microsoft YaHei"/>
+                <a:cs typeface="Microsoft YaHei"/>
+              </a:rPr>
+              <a:t>Encode and compress tensors</a:t>
             </a:r>
             <a:endParaRPr lang="zh-CN" sz="1200"/>
           </a:p>
@@ -3647,15 +3647,15 @@
           <a:p>
             <a:pPr algn="ctr"/>
             <a:r>
-              <a:rPr lang="zh-CN" sz="1150">
+              <a:rPr lang="zh-CN" sz="1045">
                 <a:solidFill>
                   <a:srgbClr val="111111"/>
                 </a:solidFill>
-                <a:latin typeface="Microsoft YaHei"/>
-                <a:ea typeface="Microsoft YaHei"/>
-                <a:cs typeface="Microsoft YaHei"/>
-              </a:rPr>
-              <a:t>BF16 / FP32 · codec 协商</a:t>
+                <a:latin typeface="Arial"/>
+                <a:ea typeface="Microsoft YaHei"/>
+                <a:cs typeface="Microsoft YaHei"/>
+              </a:rPr>
+              <a:t>BF16 / FP32 · Codec negotiation</a:t>
             </a:r>
             <a:endParaRPr lang="zh-CN" sz="1150"/>
           </a:p>
@@ -3688,15 +3688,15 @@
           <a:p>
             <a:pPr algn="ctr"/>
             <a:r>
-              <a:rPr lang="zh-CN" sz="1200" b="1">
+              <a:rPr lang="zh-CN" sz="1164" b="1">
                 <a:solidFill>
                   <a:srgbClr val="111111"/>
                 </a:solidFill>
-                <a:latin typeface="Microsoft YaHei"/>
-                <a:ea typeface="Microsoft YaHei"/>
-                <a:cs typeface="Microsoft YaHei"/>
-              </a:rPr>
-              <a:t>动作时间线</a:t>
+                <a:latin typeface="Arial"/>
+                <a:ea typeface="Microsoft YaHei"/>
+                <a:cs typeface="Microsoft YaHei"/>
+              </a:rPr>
+              <a:t>Action timeline</a:t>
             </a:r>
             <a:endParaRPr lang="zh-CN" sz="1200"/>
           </a:p>
@@ -3729,11 +3729,11 @@
           <a:p>
             <a:pPr algn="ctr"/>
             <a:r>
-              <a:rPr lang="zh-CN" sz="1060">
+              <a:rPr lang="zh-CN" sz="1028">
                 <a:solidFill>
                   <a:srgbClr val="111111"/>
                 </a:solidFill>
-                <a:latin typeface="Microsoft YaHei"/>
+                <a:latin typeface="Arial"/>
                 <a:ea typeface="Microsoft YaHei"/>
                 <a:cs typeface="Microsoft YaHei"/>
               </a:rPr>
@@ -3770,11 +3770,11 @@
           <a:p>
             <a:pPr algn="ctr"/>
             <a:r>
-              <a:rPr lang="zh-CN" sz="1150">
+              <a:rPr lang="zh-CN" sz="1115">
                 <a:solidFill>
                   <a:srgbClr val="111111"/>
                 </a:solidFill>
-                <a:latin typeface="Microsoft YaHei"/>
+                <a:latin typeface="Arial"/>
                 <a:ea typeface="Microsoft YaHei"/>
                 <a:cs typeface="Microsoft YaHei"/>
               </a:rPr>
@@ -3811,11 +3811,11 @@
           <a:p>
             <a:pPr algn="ctr"/>
             <a:r>
-              <a:rPr lang="zh-CN" sz="1150">
+              <a:rPr lang="zh-CN" sz="1115">
                 <a:solidFill>
                   <a:srgbClr val="111111"/>
                 </a:solidFill>
-                <a:latin typeface="Microsoft YaHei"/>
+                <a:latin typeface="Arial"/>
                 <a:ea typeface="Microsoft YaHei"/>
                 <a:cs typeface="Microsoft YaHei"/>
               </a:rPr>
@@ -3852,15 +3852,15 @@
           <a:p>
             <a:pPr algn="ctr"/>
             <a:r>
-              <a:rPr lang="zh-CN" sz="1150">
+              <a:rPr lang="zh-CN" sz="912">
                 <a:solidFill>
                   <a:srgbClr val="111111"/>
                 </a:solidFill>
-                <a:latin typeface="Microsoft YaHei"/>
-                <a:ea typeface="Microsoft YaHei"/>
-                <a:cs typeface="Microsoft YaHei"/>
-              </a:rPr>
-              <a:t>按实际控制步对齐</a:t>
+                <a:latin typeface="Arial"/>
+                <a:ea typeface="Microsoft YaHei"/>
+                <a:cs typeface="Microsoft YaHei"/>
+              </a:rPr>
+              <a:t>Align by executed control steps</a:t>
             </a:r>
             <a:endParaRPr lang="zh-CN" sz="1150"/>
           </a:p>
@@ -3893,15 +3893,15 @@
           <a:p>
             <a:pPr algn="ctr"/>
             <a:r>
-              <a:rPr lang="zh-CN" sz="1200" b="1">
+              <a:rPr lang="zh-CN" sz="1164" b="1">
                 <a:solidFill>
                   <a:srgbClr val="111111"/>
                 </a:solidFill>
-                <a:latin typeface="Microsoft YaHei"/>
-                <a:ea typeface="Microsoft YaHei"/>
-                <a:cs typeface="Microsoft YaHei"/>
-              </a:rPr>
-              <a:t>控制执行</a:t>
+                <a:latin typeface="Arial"/>
+                <a:ea typeface="Microsoft YaHei"/>
+                <a:cs typeface="Microsoft YaHei"/>
+              </a:rPr>
+              <a:t>Control execution</a:t>
             </a:r>
             <a:endParaRPr lang="zh-CN" sz="1200"/>
           </a:p>
@@ -3934,15 +3934,15 @@
           <a:p>
             <a:pPr algn="l"/>
             <a:r>
-              <a:rPr lang="zh-CN" sz="1200" b="1">
+              <a:rPr lang="zh-CN" sz="1164" b="1">
                 <a:solidFill>
                   <a:srgbClr val="1354AA"/>
                 </a:solidFill>
-                <a:latin typeface="Microsoft YaHei"/>
-                <a:ea typeface="Microsoft YaHei"/>
-                <a:cs typeface="Microsoft YaHei"/>
-              </a:rPr>
-              <a:t>Orin 不加载模型权重</a:t>
+                <a:latin typeface="Arial"/>
+                <a:ea typeface="Microsoft YaHei"/>
+                <a:cs typeface="Microsoft YaHei"/>
+              </a:rPr>
+              <a:t>No model weights on Orin</a:t>
             </a:r>
             <a:endParaRPr lang="zh-CN" sz="1200"/>
           </a:p>
@@ -3975,15 +3975,15 @@
           <a:p>
             <a:pPr algn="ctr"/>
             <a:r>
-              <a:rPr lang="zh-CN" sz="1200">
+              <a:rPr lang="zh-CN" sz="1100">
                 <a:solidFill>
                   <a:srgbClr val="111111"/>
                 </a:solidFill>
-                <a:latin typeface="Microsoft YaHei"/>
-                <a:ea typeface="Microsoft YaHei"/>
-                <a:cs typeface="Microsoft YaHei"/>
-              </a:rPr>
-              <a:t>接收 · 解压 · 校验</a:t>
+                <a:latin typeface="Arial"/>
+                <a:ea typeface="Microsoft YaHei"/>
+                <a:cs typeface="Microsoft YaHei"/>
+              </a:rPr>
+              <a:t>Receive · Decompress · Validate</a:t>
             </a:r>
             <a:endParaRPr lang="zh-CN" sz="1200"/>
           </a:p>
@@ -4016,11 +4016,11 @@
           <a:p>
             <a:pPr algn="ctr"/>
             <a:r>
-              <a:rPr lang="zh-CN" sz="1200">
+              <a:rPr lang="zh-CN" sz="1164">
                 <a:solidFill>
                   <a:srgbClr val="111111"/>
                 </a:solidFill>
-                <a:latin typeface="Microsoft YaHei"/>
+                <a:latin typeface="Arial"/>
                 <a:ea typeface="Microsoft YaHei"/>
                 <a:cs typeface="Microsoft YaHei"/>
               </a:rPr>
@@ -4057,15 +4057,15 @@
           <a:p>
             <a:pPr algn="ctr"/>
             <a:r>
-              <a:rPr lang="zh-CN" sz="1150">
+              <a:rPr lang="zh-CN" sz="1115">
                 <a:solidFill>
                   <a:srgbClr val="111111"/>
                 </a:solidFill>
-                <a:latin typeface="Microsoft YaHei"/>
-                <a:ea typeface="Microsoft YaHei"/>
-                <a:cs typeface="Microsoft YaHei"/>
-              </a:rPr>
-              <a:t>视觉编码</a:t>
+                <a:latin typeface="Arial"/>
+                <a:ea typeface="Microsoft YaHei"/>
+                <a:cs typeface="Microsoft YaHei"/>
+              </a:rPr>
+              <a:t>Vision encoder</a:t>
             </a:r>
             <a:endParaRPr lang="zh-CN" sz="1150"/>
           </a:p>
@@ -4098,11 +4098,11 @@
           <a:p>
             <a:pPr algn="ctr"/>
             <a:r>
-              <a:rPr lang="zh-CN" sz="1200">
+              <a:rPr lang="zh-CN" sz="1164">
                 <a:solidFill>
                   <a:srgbClr val="111111"/>
                 </a:solidFill>
-                <a:latin typeface="Microsoft YaHei"/>
+                <a:latin typeface="Arial"/>
                 <a:ea typeface="Microsoft YaHei"/>
                 <a:cs typeface="Microsoft YaHei"/>
               </a:rPr>
@@ -4139,15 +4139,15 @@
           <a:p>
             <a:pPr algn="ctr"/>
             <a:r>
-              <a:rPr lang="zh-CN" sz="1150">
+              <a:rPr lang="zh-CN" sz="1115">
                 <a:solidFill>
                   <a:srgbClr val="111111"/>
                 </a:solidFill>
-                <a:latin typeface="Microsoft YaHei"/>
-                <a:ea typeface="Microsoft YaHei"/>
-                <a:cs typeface="Microsoft YaHei"/>
-              </a:rPr>
-              <a:t>在线文本编码</a:t>
+                <a:latin typeface="Arial"/>
+                <a:ea typeface="Microsoft YaHei"/>
+                <a:cs typeface="Microsoft YaHei"/>
+              </a:rPr>
+              <a:t>Online text encoder</a:t>
             </a:r>
             <a:endParaRPr lang="zh-CN" sz="1150"/>
           </a:p>
@@ -4180,11 +4180,11 @@
           <a:p>
             <a:pPr algn="ctr"/>
             <a:r>
-              <a:rPr lang="zh-CN" sz="1120">
+              <a:rPr lang="zh-CN" sz="1086">
                 <a:solidFill>
                   <a:srgbClr val="111111"/>
                 </a:solidFill>
-                <a:latin typeface="Microsoft YaHei"/>
+                <a:latin typeface="Arial"/>
                 <a:ea typeface="Microsoft YaHei"/>
                 <a:cs typeface="Microsoft YaHei"/>
               </a:rPr>
@@ -4221,15 +4221,15 @@
           <a:p>
             <a:pPr algn="ctr"/>
             <a:r>
-              <a:rPr lang="zh-CN" sz="1150">
+              <a:rPr lang="zh-CN" sz="1115">
                 <a:solidFill>
                   <a:srgbClr val="111111"/>
                 </a:solidFill>
-                <a:latin typeface="Microsoft YaHei"/>
-                <a:ea typeface="Microsoft YaHei"/>
-                <a:cs typeface="Microsoft YaHei"/>
-              </a:rPr>
-              <a:t>状态投影</a:t>
+                <a:latin typeface="Arial"/>
+                <a:ea typeface="Microsoft YaHei"/>
+                <a:cs typeface="Microsoft YaHei"/>
+              </a:rPr>
+              <a:t>State embedding</a:t>
             </a:r>
             <a:endParaRPr lang="zh-CN" sz="1150"/>
           </a:p>
@@ -4262,11 +4262,11 @@
           <a:p>
             <a:pPr algn="ctr"/>
             <a:r>
-              <a:rPr lang="zh-CN" sz="1420">
+              <a:rPr lang="zh-CN" sz="1377">
                 <a:solidFill>
                   <a:srgbClr val="111111"/>
                 </a:solidFill>
-                <a:latin typeface="Microsoft YaHei"/>
+                <a:latin typeface="Arial"/>
                 <a:ea typeface="Microsoft YaHei"/>
                 <a:cs typeface="Microsoft YaHei"/>
               </a:rPr>
@@ -4303,11 +4303,11 @@
           <a:p>
             <a:pPr algn="ctr"/>
             <a:r>
-              <a:rPr lang="zh-CN" sz="1420">
+              <a:rPr lang="zh-CN" sz="1377">
                 <a:solidFill>
                   <a:srgbClr val="111111"/>
                 </a:solidFill>
-                <a:latin typeface="Microsoft YaHei"/>
+                <a:latin typeface="Arial"/>
                 <a:ea typeface="Microsoft YaHei"/>
                 <a:cs typeface="Microsoft YaHei"/>
               </a:rPr>
@@ -4344,11 +4344,11 @@
           <a:p>
             <a:pPr algn="ctr"/>
             <a:r>
-              <a:rPr lang="zh-CN" sz="1300">
+              <a:rPr lang="zh-CN" sz="1261">
                 <a:solidFill>
                   <a:srgbClr val="111111"/>
                 </a:solidFill>
-                <a:latin typeface="Microsoft YaHei"/>
+                <a:latin typeface="Arial"/>
                 <a:ea typeface="Microsoft YaHei"/>
                 <a:cs typeface="Microsoft YaHei"/>
               </a:rPr>
@@ -4385,11 +4385,11 @@
           <a:p>
             <a:pPr algn="ctr"/>
             <a:r>
-              <a:rPr lang="zh-CN" sz="890">
+              <a:rPr lang="zh-CN" sz="863">
                 <a:solidFill>
                   <a:srgbClr val="111111"/>
                 </a:solidFill>
-                <a:latin typeface="Microsoft YaHei"/>
+                <a:latin typeface="Arial"/>
                 <a:ea typeface="Microsoft YaHei"/>
                 <a:cs typeface="Microsoft YaHei"/>
               </a:rPr>
@@ -4426,11 +4426,11 @@
           <a:p>
             <a:pPr algn="ctr"/>
             <a:r>
-              <a:rPr lang="zh-CN" sz="890">
+              <a:rPr lang="zh-CN" sz="863">
                 <a:solidFill>
                   <a:srgbClr val="111111"/>
                 </a:solidFill>
-                <a:latin typeface="Microsoft YaHei"/>
+                <a:latin typeface="Arial"/>
                 <a:ea typeface="Microsoft YaHei"/>
                 <a:cs typeface="Microsoft YaHei"/>
               </a:rPr>
@@ -4467,11 +4467,11 @@
           <a:p>
             <a:pPr algn="ctr"/>
             <a:r>
-              <a:rPr lang="zh-CN" sz="1050">
+              <a:rPr lang="zh-CN" sz="1018">
                 <a:solidFill>
                   <a:srgbClr val="111111"/>
                 </a:solidFill>
-                <a:latin typeface="Microsoft YaHei"/>
+                <a:latin typeface="Arial"/>
                 <a:ea typeface="Microsoft YaHei"/>
                 <a:cs typeface="Microsoft YaHei"/>
               </a:rPr>
@@ -4508,11 +4508,11 @@
           <a:p>
             <a:pPr algn="ctr"/>
             <a:r>
-              <a:rPr lang="zh-CN" sz="1420">
+              <a:rPr lang="zh-CN" sz="1377">
                 <a:solidFill>
                   <a:srgbClr val="111111"/>
                 </a:solidFill>
-                <a:latin typeface="Microsoft YaHei"/>
+                <a:latin typeface="Arial"/>
                 <a:ea typeface="Microsoft YaHei"/>
                 <a:cs typeface="Microsoft YaHei"/>
               </a:rPr>
@@ -4549,11 +4549,11 @@
           <a:p>
             <a:pPr algn="ctr"/>
             <a:r>
-              <a:rPr lang="zh-CN" sz="1050">
+              <a:rPr lang="zh-CN" sz="1018">
                 <a:solidFill>
                   <a:srgbClr val="111111"/>
                 </a:solidFill>
-                <a:latin typeface="Microsoft YaHei"/>
+                <a:latin typeface="Arial"/>
                 <a:ea typeface="Microsoft YaHei"/>
                 <a:cs typeface="Microsoft YaHei"/>
               </a:rPr>
@@ -4590,11 +4590,11 @@
           <a:p>
             <a:pPr algn="ctr"/>
             <a:r>
-              <a:rPr lang="zh-CN" sz="1200">
+              <a:rPr lang="zh-CN" sz="1164">
                 <a:solidFill>
                   <a:srgbClr val="111111"/>
                 </a:solidFill>
-                <a:latin typeface="Microsoft YaHei"/>
+                <a:latin typeface="Arial"/>
                 <a:ea typeface="Microsoft YaHei"/>
                 <a:cs typeface="Microsoft YaHei"/>
               </a:rPr>
@@ -4631,15 +4631,15 @@
           <a:p>
             <a:pPr algn="ctr"/>
             <a:r>
-              <a:rPr lang="zh-CN" sz="1200">
+              <a:rPr lang="zh-CN" sz="1164">
                 <a:solidFill>
                   <a:srgbClr val="111111"/>
                 </a:solidFill>
-                <a:latin typeface="Microsoft YaHei"/>
-                <a:ea typeface="Microsoft YaHei"/>
-                <a:cs typeface="Microsoft YaHei"/>
-              </a:rPr>
-              <a:t>动作反归一化</a:t>
+                <a:latin typeface="Arial"/>
+                <a:ea typeface="Microsoft YaHei"/>
+                <a:cs typeface="Microsoft YaHei"/>
+              </a:rPr>
+              <a:t>Action denormalization</a:t>
             </a:r>
             <a:endParaRPr lang="zh-CN" sz="1200"/>
           </a:p>
@@ -4672,15 +4672,15 @@
           <a:p>
             <a:pPr algn="r"/>
             <a:r>
-              <a:rPr lang="zh-CN" sz="1120">
+              <a:rPr lang="zh-CN" sz="1086">
                 <a:solidFill>
                   <a:srgbClr val="1354AA"/>
                 </a:solidFill>
-                <a:latin typeface="Microsoft YaHei"/>
-                <a:ea typeface="Microsoft YaHei"/>
-                <a:cs typeface="Microsoft YaHei"/>
-              </a:rPr>
-              <a:t>Checkpoint · DINOv3 · BERT · 统计文件</a:t>
+                <a:latin typeface="Arial"/>
+                <a:ea typeface="Microsoft YaHei"/>
+                <a:cs typeface="Microsoft YaHei"/>
+              </a:rPr>
+              <a:t>Checkpoint · DINOv3 · BERT · Statistics</a:t>
             </a:r>
             <a:endParaRPr lang="zh-CN" sz="1120"/>
           </a:p>
@@ -4713,11 +4713,11 @@
           <a:p>
             <a:pPr algn="ctr"/>
             <a:r>
-              <a:rPr lang="zh-CN" sz="1150">
+              <a:rPr lang="zh-CN" sz="1115">
                 <a:solidFill>
                   <a:srgbClr val="111111"/>
                 </a:solidFill>
-                <a:latin typeface="Microsoft YaHei"/>
+                <a:latin typeface="Arial"/>
                 <a:ea typeface="Microsoft YaHei"/>
                 <a:cs typeface="Microsoft YaHei"/>
               </a:rPr>
@@ -4754,15 +4754,15 @@
           <a:p>
             <a:pPr algn="ctr"/>
             <a:r>
-              <a:rPr lang="zh-CN" sz="1150">
+              <a:rPr lang="zh-CN" sz="784">
                 <a:solidFill>
                   <a:srgbClr val="111111"/>
                 </a:solidFill>
-                <a:latin typeface="Microsoft YaHei"/>
-                <a:ea typeface="Microsoft YaHei"/>
-                <a:cs typeface="Microsoft YaHei"/>
-              </a:rPr>
-              <a:t>标准化张量 + 指令</a:t>
+                <a:latin typeface="Arial"/>
+                <a:ea typeface="Microsoft YaHei"/>
+                <a:cs typeface="Microsoft YaHei"/>
+              </a:rPr>
+              <a:t>Normalized tensors + instruction</a:t>
             </a:r>
             <a:endParaRPr lang="zh-CN" sz="1150"/>
           </a:p>
@@ -4795,15 +4795,15 @@
           <a:p>
             <a:pPr algn="ctr"/>
             <a:r>
-              <a:rPr lang="zh-CN" sz="1150">
+              <a:rPr lang="zh-CN" sz="1115">
                 <a:solidFill>
                   <a:srgbClr val="111111"/>
                 </a:solidFill>
-                <a:latin typeface="Microsoft YaHei"/>
-                <a:ea typeface="Microsoft YaHei"/>
-                <a:cs typeface="Microsoft YaHei"/>
-              </a:rPr>
-              <a:t>12 × 7 动作块</a:t>
+                <a:latin typeface="Arial"/>
+                <a:ea typeface="Microsoft YaHei"/>
+                <a:cs typeface="Microsoft YaHei"/>
+              </a:rPr>
+              <a:t>12 × 7 action chunk</a:t>
             </a:r>
             <a:endParaRPr lang="zh-CN" sz="1150"/>
           </a:p>
@@ -4836,15 +4836,15 @@
           <a:p>
             <a:pPr algn="ctr"/>
             <a:r>
-              <a:rPr lang="zh-CN" sz="1150">
+              <a:rPr lang="zh-CN" sz="1065">
                 <a:solidFill>
                   <a:srgbClr val="111111"/>
                 </a:solidFill>
-                <a:latin typeface="Microsoft YaHei"/>
-                <a:ea typeface="Microsoft YaHei"/>
-                <a:cs typeface="Microsoft YaHei"/>
-              </a:rPr>
-              <a:t>请求 ID · 计时</a:t>
+                <a:latin typeface="Arial"/>
+                <a:ea typeface="Microsoft YaHei"/>
+                <a:cs typeface="Microsoft YaHei"/>
+              </a:rPr>
+              <a:t>Request ID · Timings</a:t>
             </a:r>
             <a:endParaRPr lang="zh-CN" sz="1150"/>
           </a:p>
@@ -4877,15 +4877,15 @@
           <a:p>
             <a:pPr algn="ctr"/>
             <a:r>
-              <a:rPr lang="zh-CN" sz="1150">
+              <a:rPr lang="zh-CN" sz="1115">
                 <a:solidFill>
                   <a:srgbClr val="111111"/>
                 </a:solidFill>
-                <a:latin typeface="Microsoft YaHei"/>
-                <a:ea typeface="Microsoft YaHei"/>
-                <a:cs typeface="Microsoft YaHei"/>
-              </a:rPr>
-              <a:t>最多 1 个请求在途</a:t>
+                <a:latin typeface="Arial"/>
+                <a:ea typeface="Microsoft YaHei"/>
+                <a:cs typeface="Microsoft YaHei"/>
+              </a:rPr>
+              <a:t>One request in flight</a:t>
             </a:r>
             <a:endParaRPr lang="zh-CN" sz="1150"/>
           </a:p>
@@ -4918,15 +4918,15 @@
           <a:p>
             <a:pPr algn="l"/>
             <a:r>
-              <a:rPr lang="zh-CN" sz="1200">
+              <a:rPr lang="zh-CN" sz="1164">
                 <a:solidFill>
                   <a:srgbClr val="111111"/>
                 </a:solidFill>
-                <a:latin typeface="Microsoft YaHei"/>
-                <a:ea typeface="Microsoft YaHei"/>
-                <a:cs typeface="Microsoft YaHei"/>
-              </a:rPr>
-              <a:t>闭环记录： 成功率 · 控制间隔 p95 · hold_steps · 分阶段耗时</a:t>
+                <a:latin typeface="Arial"/>
+                <a:ea typeface="Microsoft YaHei"/>
+                <a:cs typeface="Microsoft YaHei"/>
+              </a:rPr>
+              <a:t>Metrics: success rate · control-interval p95 · hold_steps · stage timings</a:t>
             </a:r>
             <a:endParaRPr lang="zh-CN" sz="1200"/>
           </a:p>
@@ -4959,15 +4959,15 @@
           <a:p>
             <a:pPr algn="l"/>
             <a:r>
-              <a:rPr lang="zh-CN" sz="1050">
+              <a:rPr lang="zh-CN" sz="1018">
                 <a:solidFill>
                   <a:srgbClr val="111111"/>
                 </a:solidFill>
-                <a:latin typeface="Microsoft YaHei"/>
-                <a:ea typeface="Microsoft YaHei"/>
-                <a:cs typeface="Microsoft YaHei"/>
-              </a:rPr>
-              <a:t>默认 H=12 / R=4 / B=3；20 Hz 为控制频率上限，性能以实测为准。</a:t>
+                <a:latin typeface="Arial"/>
+                <a:ea typeface="Microsoft YaHei"/>
+                <a:cs typeface="Microsoft YaHei"/>
+              </a:rPr>
+              <a:t>Defaults: H=12 / R=4 / B=3. Control is capped at 20 Hz; performance is measured.</a:t>
             </a:r>
             <a:endParaRPr lang="zh-CN" sz="1050"/>
           </a:p>
@@ -8055,15 +8055,15 @@
           <a:p>
             <a:pPr algn="l"/>
             <a:r>
-              <a:rPr lang="zh-CN" sz="2300" b="1">
+              <a:rPr lang="zh-CN" sz="2060" b="1">
                 <a:solidFill>
                   <a:srgbClr val="111820"/>
                 </a:solidFill>
-                <a:latin typeface="Microsoft YaHei"/>
-                <a:ea typeface="Microsoft YaHei"/>
-                <a:cs typeface="Microsoft YaHei"/>
-              </a:rPr>
-              <a:t>三种协同推理流水线</a:t>
+                <a:latin typeface="Arial"/>
+                <a:ea typeface="Microsoft YaHei"/>
+                <a:cs typeface="Microsoft YaHei"/>
+              </a:rPr>
+              <a:t>Three Collaborative Inference Pipelines</a:t>
             </a:r>
             <a:endParaRPr lang="zh-CN" sz="2300"/>
           </a:p>
@@ -8096,15 +8096,15 @@
           <a:p>
             <a:pPr algn="l"/>
             <a:r>
-              <a:rPr lang="zh-CN" sz="1250">
+              <a:rPr lang="zh-CN" sz="1212">
                 <a:solidFill>
                   <a:srgbClr val="111820"/>
                 </a:solidFill>
-                <a:latin typeface="Microsoft YaHei"/>
-                <a:ea typeface="Microsoft YaHei"/>
-                <a:cs typeface="Microsoft YaHei"/>
-              </a:rPr>
-              <a:t>Orin Nano 8GB 执行动作    Thor 128GB 完整模型推理</a:t>
+                <a:latin typeface="Arial"/>
+                <a:ea typeface="Microsoft YaHei"/>
+                <a:cs typeface="Microsoft YaHei"/>
+              </a:rPr>
+              <a:t>Orin Nano 8GB: action execution    Thor 128GB: complete-model inference</a:t>
             </a:r>
             <a:endParaRPr lang="zh-CN" sz="1250"/>
           </a:p>
@@ -8137,15 +8137,15 @@
           <a:p>
             <a:pPr algn="l"/>
             <a:r>
-              <a:rPr lang="zh-CN" sz="1150">
+              <a:rPr lang="zh-CN" sz="1115">
                 <a:solidFill>
                   <a:srgbClr val="111820"/>
                 </a:solidFill>
-                <a:latin typeface="Microsoft YaHei"/>
-                <a:ea typeface="Microsoft YaHei"/>
-                <a:cs typeface="Microsoft YaHei"/>
-              </a:rPr>
-              <a:t>H=12 / R=4 / B=3；推理耗时假设为 2 个示意单位，不代表实测性能。</a:t>
+                <a:latin typeface="Arial"/>
+                <a:ea typeface="Microsoft YaHei"/>
+                <a:cs typeface="Microsoft YaHei"/>
+              </a:rPr>
+              <a:t>H=12 / R=4 / B=3. Inference takes 2 illustrative units; timings are not measured.</a:t>
             </a:r>
             <a:endParaRPr lang="zh-CN" sz="1150"/>
           </a:p>
@@ -8178,15 +8178,15 @@
           <a:p>
             <a:pPr algn="l"/>
             <a:r>
-              <a:rPr lang="zh-CN" sz="1150">
+              <a:rPr lang="zh-CN" sz="1115">
                 <a:solidFill>
                   <a:srgbClr val="111820"/>
                 </a:solidFill>
-                <a:latin typeface="Microsoft YaHei"/>
-                <a:ea typeface="Microsoft YaHei"/>
-                <a:cs typeface="Microsoft YaHei"/>
-              </a:rPr>
-              <a:t>示意墙钟时间 →</a:t>
+                <a:latin typeface="Arial"/>
+                <a:ea typeface="Microsoft YaHei"/>
+                <a:cs typeface="Microsoft YaHei"/>
+              </a:rPr>
+              <a:t>Illustrative wall time →</a:t>
             </a:r>
             <a:endParaRPr lang="zh-CN" sz="1150"/>
           </a:p>
@@ -8219,11 +8219,11 @@
           <a:p>
             <a:pPr algn="ctr"/>
             <a:r>
-              <a:rPr lang="zh-CN" sz="1200">
+              <a:rPr lang="zh-CN" sz="1164">
                 <a:solidFill>
                   <a:srgbClr val="111820"/>
                 </a:solidFill>
-                <a:latin typeface="Microsoft YaHei"/>
+                <a:latin typeface="Arial"/>
                 <a:ea typeface="Microsoft YaHei"/>
                 <a:cs typeface="Microsoft YaHei"/>
               </a:rPr>
@@ -8260,11 +8260,11 @@
           <a:p>
             <a:pPr algn="ctr"/>
             <a:r>
-              <a:rPr lang="zh-CN" sz="1200">
+              <a:rPr lang="zh-CN" sz="1164">
                 <a:solidFill>
                   <a:srgbClr val="111820"/>
                 </a:solidFill>
-                <a:latin typeface="Microsoft YaHei"/>
+                <a:latin typeface="Arial"/>
                 <a:ea typeface="Microsoft YaHei"/>
                 <a:cs typeface="Microsoft YaHei"/>
               </a:rPr>
@@ -8301,11 +8301,11 @@
           <a:p>
             <a:pPr algn="ctr"/>
             <a:r>
-              <a:rPr lang="zh-CN" sz="1200">
+              <a:rPr lang="zh-CN" sz="1164">
                 <a:solidFill>
                   <a:srgbClr val="111820"/>
                 </a:solidFill>
-                <a:latin typeface="Microsoft YaHei"/>
+                <a:latin typeface="Arial"/>
                 <a:ea typeface="Microsoft YaHei"/>
                 <a:cs typeface="Microsoft YaHei"/>
               </a:rPr>
@@ -8342,11 +8342,11 @@
           <a:p>
             <a:pPr algn="ctr"/>
             <a:r>
-              <a:rPr lang="zh-CN" sz="1200">
+              <a:rPr lang="zh-CN" sz="1164">
                 <a:solidFill>
                   <a:srgbClr val="111820"/>
                 </a:solidFill>
-                <a:latin typeface="Microsoft YaHei"/>
+                <a:latin typeface="Arial"/>
                 <a:ea typeface="Microsoft YaHei"/>
                 <a:cs typeface="Microsoft YaHei"/>
               </a:rPr>
@@ -8383,11 +8383,11 @@
           <a:p>
             <a:pPr algn="ctr"/>
             <a:r>
-              <a:rPr lang="zh-CN" sz="1200">
+              <a:rPr lang="zh-CN" sz="1164">
                 <a:solidFill>
                   <a:srgbClr val="111820"/>
                 </a:solidFill>
-                <a:latin typeface="Microsoft YaHei"/>
+                <a:latin typeface="Arial"/>
                 <a:ea typeface="Microsoft YaHei"/>
                 <a:cs typeface="Microsoft YaHei"/>
               </a:rPr>
@@ -8424,11 +8424,11 @@
           <a:p>
             <a:pPr algn="ctr"/>
             <a:r>
-              <a:rPr lang="zh-CN" sz="1200">
+              <a:rPr lang="zh-CN" sz="1164">
                 <a:solidFill>
                   <a:srgbClr val="111820"/>
                 </a:solidFill>
-                <a:latin typeface="Microsoft YaHei"/>
+                <a:latin typeface="Arial"/>
                 <a:ea typeface="Microsoft YaHei"/>
                 <a:cs typeface="Microsoft YaHei"/>
               </a:rPr>
@@ -8465,11 +8465,11 @@
           <a:p>
             <a:pPr algn="ctr"/>
             <a:r>
-              <a:rPr lang="zh-CN" sz="1200">
+              <a:rPr lang="zh-CN" sz="1164">
                 <a:solidFill>
                   <a:srgbClr val="111820"/>
                 </a:solidFill>
-                <a:latin typeface="Microsoft YaHei"/>
+                <a:latin typeface="Arial"/>
                 <a:ea typeface="Microsoft YaHei"/>
                 <a:cs typeface="Microsoft YaHei"/>
               </a:rPr>
@@ -8506,11 +8506,11 @@
           <a:p>
             <a:pPr algn="ctr"/>
             <a:r>
-              <a:rPr lang="zh-CN" sz="1200">
+              <a:rPr lang="zh-CN" sz="1164">
                 <a:solidFill>
                   <a:srgbClr val="111820"/>
                 </a:solidFill>
-                <a:latin typeface="Microsoft YaHei"/>
+                <a:latin typeface="Arial"/>
                 <a:ea typeface="Microsoft YaHei"/>
                 <a:cs typeface="Microsoft YaHei"/>
               </a:rPr>
@@ -8547,11 +8547,11 @@
           <a:p>
             <a:pPr algn="ctr"/>
             <a:r>
-              <a:rPr lang="zh-CN" sz="1200">
+              <a:rPr lang="zh-CN" sz="1164">
                 <a:solidFill>
                   <a:srgbClr val="111820"/>
                 </a:solidFill>
-                <a:latin typeface="Microsoft YaHei"/>
+                <a:latin typeface="Arial"/>
                 <a:ea typeface="Microsoft YaHei"/>
                 <a:cs typeface="Microsoft YaHei"/>
               </a:rPr>
@@ -8588,11 +8588,11 @@
           <a:p>
             <a:pPr algn="ctr"/>
             <a:r>
-              <a:rPr lang="zh-CN" sz="1200">
+              <a:rPr lang="zh-CN" sz="1164">
                 <a:solidFill>
                   <a:srgbClr val="111820"/>
                 </a:solidFill>
-                <a:latin typeface="Microsoft YaHei"/>
+                <a:latin typeface="Arial"/>
                 <a:ea typeface="Microsoft YaHei"/>
                 <a:cs typeface="Microsoft YaHei"/>
               </a:rPr>
@@ -8629,11 +8629,11 @@
           <a:p>
             <a:pPr algn="l"/>
             <a:r>
-              <a:rPr lang="zh-CN" sz="1760" b="1">
+              <a:rPr lang="zh-CN" sz="1707" b="1">
                 <a:solidFill>
                   <a:srgbClr val="111820"/>
                 </a:solidFill>
-                <a:latin typeface="Microsoft YaHei"/>
+                <a:latin typeface="Arial"/>
                 <a:ea typeface="Microsoft YaHei"/>
                 <a:cs typeface="Microsoft YaHei"/>
               </a:rPr>
@@ -8670,15 +8670,15 @@
           <a:p>
             <a:pPr algn="l"/>
             <a:r>
-              <a:rPr lang="zh-CN" sz="1150">
+              <a:rPr lang="zh-CN" sz="1042">
                 <a:solidFill>
                   <a:srgbClr val="111820"/>
                 </a:solidFill>
-                <a:latin typeface="Microsoft YaHei"/>
-                <a:ea typeface="Microsoft YaHei"/>
-                <a:cs typeface="Microsoft YaHei"/>
-              </a:rPr>
-              <a:t>异步直接替换</a:t>
+                <a:latin typeface="Arial"/>
+                <a:ea typeface="Microsoft YaHei"/>
+                <a:cs typeface="Microsoft YaHei"/>
+              </a:rPr>
+              <a:t>Async replacement</a:t>
             </a:r>
             <a:endParaRPr lang="zh-CN" sz="1150"/>
           </a:p>
@@ -8711,11 +8711,11 @@
           <a:p>
             <a:pPr algn="l"/>
             <a:r>
-              <a:rPr lang="zh-CN" sz="1200">
+              <a:rPr lang="zh-CN" sz="1164">
                 <a:solidFill>
                   <a:srgbClr val="111820"/>
                 </a:solidFill>
-                <a:latin typeface="Microsoft YaHei"/>
+                <a:latin typeface="Arial"/>
                 <a:ea typeface="Microsoft YaHei"/>
                 <a:cs typeface="Microsoft YaHei"/>
               </a:rPr>
@@ -8752,11 +8752,11 @@
           <a:p>
             <a:pPr algn="l"/>
             <a:r>
-              <a:rPr lang="zh-CN" sz="1400">
+              <a:rPr lang="zh-CN" sz="1358">
                 <a:solidFill>
                   <a:srgbClr val="111820"/>
                 </a:solidFill>
-                <a:latin typeface="Microsoft YaHei"/>
+                <a:latin typeface="Arial"/>
                 <a:ea typeface="Microsoft YaHei"/>
                 <a:cs typeface="Microsoft YaHei"/>
               </a:rPr>
@@ -8793,11 +8793,11 @@
           <a:p>
             <a:pPr algn="l"/>
             <a:r>
-              <a:rPr lang="zh-CN" sz="1400">
+              <a:rPr lang="zh-CN" sz="1358">
                 <a:solidFill>
                   <a:srgbClr val="111820"/>
                 </a:solidFill>
-                <a:latin typeface="Microsoft YaHei"/>
+                <a:latin typeface="Arial"/>
                 <a:ea typeface="Microsoft YaHei"/>
                 <a:cs typeface="Microsoft YaHei"/>
               </a:rPr>
@@ -8834,15 +8834,15 @@
           <a:p>
             <a:pPr algn="ctr"/>
             <a:r>
-              <a:rPr lang="zh-CN" sz="1250">
+              <a:rPr lang="zh-CN" sz="1212">
                 <a:solidFill>
                   <a:srgbClr val="FFFFFF"/>
                 </a:solidFill>
-                <a:latin typeface="Microsoft YaHei"/>
-                <a:ea typeface="Microsoft YaHei"/>
-                <a:cs typeface="Microsoft YaHei"/>
-              </a:rPr>
-              <a:t>推理 A</a:t>
+                <a:latin typeface="Arial"/>
+                <a:ea typeface="Microsoft YaHei"/>
+                <a:cs typeface="Microsoft YaHei"/>
+              </a:rPr>
+              <a:t>Infer A</a:t>
             </a:r>
             <a:endParaRPr lang="zh-CN" sz="1250"/>
           </a:p>
@@ -8875,15 +8875,15 @@
           <a:p>
             <a:pPr algn="ctr"/>
             <a:r>
-              <a:rPr lang="zh-CN" sz="1250">
+              <a:rPr lang="zh-CN" sz="1212">
                 <a:solidFill>
                   <a:srgbClr val="FFFFFF"/>
                 </a:solidFill>
-                <a:latin typeface="Microsoft YaHei"/>
-                <a:ea typeface="Microsoft YaHei"/>
-                <a:cs typeface="Microsoft YaHei"/>
-              </a:rPr>
-              <a:t>推理 B</a:t>
+                <a:latin typeface="Arial"/>
+                <a:ea typeface="Microsoft YaHei"/>
+                <a:cs typeface="Microsoft YaHei"/>
+              </a:rPr>
+              <a:t>Infer B</a:t>
             </a:r>
             <a:endParaRPr lang="zh-CN" sz="1250"/>
           </a:p>
@@ -8916,15 +8916,15 @@
           <a:p>
             <a:pPr algn="ctr"/>
             <a:r>
-              <a:rPr lang="zh-CN" sz="1250">
+              <a:rPr lang="zh-CN" sz="1212">
                 <a:solidFill>
                   <a:srgbClr val="FFFFFF"/>
                 </a:solidFill>
-                <a:latin typeface="Microsoft YaHei"/>
-                <a:ea typeface="Microsoft YaHei"/>
-                <a:cs typeface="Microsoft YaHei"/>
-              </a:rPr>
-              <a:t>推理 C</a:t>
+                <a:latin typeface="Arial"/>
+                <a:ea typeface="Microsoft YaHei"/>
+                <a:cs typeface="Microsoft YaHei"/>
+              </a:rPr>
+              <a:t>Infer C</a:t>
             </a:r>
             <a:endParaRPr lang="zh-CN" sz="1250"/>
           </a:p>
@@ -8957,15 +8957,15 @@
           <a:p>
             <a:pPr algn="ctr"/>
             <a:r>
-              <a:rPr lang="zh-CN" sz="1250">
+              <a:rPr lang="zh-CN" sz="1212">
                 <a:solidFill>
                   <a:srgbClr val="FFFFFF"/>
                 </a:solidFill>
-                <a:latin typeface="Microsoft YaHei"/>
-                <a:ea typeface="Microsoft YaHei"/>
-                <a:cs typeface="Microsoft YaHei"/>
-              </a:rPr>
-              <a:t>推理 D</a:t>
+                <a:latin typeface="Arial"/>
+                <a:ea typeface="Microsoft YaHei"/>
+                <a:cs typeface="Microsoft YaHei"/>
+              </a:rPr>
+              <a:t>Infer D</a:t>
             </a:r>
             <a:endParaRPr lang="zh-CN" sz="1250"/>
           </a:p>
@@ -8998,15 +8998,15 @@
           <a:p>
             <a:pPr algn="ctr"/>
             <a:r>
-              <a:rPr lang="zh-CN" sz="1200">
+              <a:rPr lang="zh-CN" sz="1164">
                 <a:solidFill>
                   <a:srgbClr val="111820"/>
                 </a:solidFill>
-                <a:latin typeface="Microsoft YaHei"/>
-                <a:ea typeface="Microsoft YaHei"/>
-                <a:cs typeface="Microsoft YaHei"/>
-              </a:rPr>
-              <a:t>等待</a:t>
+                <a:latin typeface="Arial"/>
+                <a:ea typeface="Microsoft YaHei"/>
+                <a:cs typeface="Microsoft YaHei"/>
+              </a:rPr>
+              <a:t>Wait</a:t>
             </a:r>
             <a:endParaRPr lang="zh-CN" sz="1200"/>
           </a:p>
@@ -9039,15 +9039,15 @@
           <a:p>
             <a:pPr algn="ctr"/>
             <a:r>
-              <a:rPr lang="zh-CN" sz="1200">
+              <a:rPr lang="zh-CN" sz="1164">
                 <a:solidFill>
                   <a:srgbClr val="111820"/>
                 </a:solidFill>
-                <a:latin typeface="Microsoft YaHei"/>
-                <a:ea typeface="Microsoft YaHei"/>
-                <a:cs typeface="Microsoft YaHei"/>
-              </a:rPr>
-              <a:t>等待</a:t>
+                <a:latin typeface="Arial"/>
+                <a:ea typeface="Microsoft YaHei"/>
+                <a:cs typeface="Microsoft YaHei"/>
+              </a:rPr>
+              <a:t>Wait</a:t>
             </a:r>
             <a:endParaRPr lang="zh-CN" sz="1200"/>
           </a:p>
@@ -9080,11 +9080,11 @@
           <a:p>
             <a:pPr algn="ctr"/>
             <a:r>
-              <a:rPr lang="zh-CN" sz="1200">
+              <a:rPr lang="zh-CN" sz="1164">
                 <a:solidFill>
                   <a:srgbClr val="111820"/>
                 </a:solidFill>
-                <a:latin typeface="Microsoft YaHei"/>
+                <a:latin typeface="Arial"/>
                 <a:ea typeface="Microsoft YaHei"/>
                 <a:cs typeface="Microsoft YaHei"/>
               </a:rPr>
@@ -9121,11 +9121,11 @@
           <a:p>
             <a:pPr algn="ctr"/>
             <a:r>
-              <a:rPr lang="zh-CN" sz="1200">
+              <a:rPr lang="zh-CN" sz="1164">
                 <a:solidFill>
                   <a:srgbClr val="111820"/>
                 </a:solidFill>
-                <a:latin typeface="Microsoft YaHei"/>
+                <a:latin typeface="Arial"/>
                 <a:ea typeface="Microsoft YaHei"/>
                 <a:cs typeface="Microsoft YaHei"/>
               </a:rPr>
@@ -9162,11 +9162,11 @@
           <a:p>
             <a:pPr algn="ctr"/>
             <a:r>
-              <a:rPr lang="zh-CN" sz="1200">
+              <a:rPr lang="zh-CN" sz="1164">
                 <a:solidFill>
                   <a:srgbClr val="111820"/>
                 </a:solidFill>
-                <a:latin typeface="Microsoft YaHei"/>
+                <a:latin typeface="Arial"/>
                 <a:ea typeface="Microsoft YaHei"/>
                 <a:cs typeface="Microsoft YaHei"/>
               </a:rPr>
@@ -9203,11 +9203,11 @@
           <a:p>
             <a:pPr algn="ctr"/>
             <a:r>
-              <a:rPr lang="zh-CN" sz="1200">
+              <a:rPr lang="zh-CN" sz="1164">
                 <a:solidFill>
                   <a:srgbClr val="111820"/>
                 </a:solidFill>
-                <a:latin typeface="Microsoft YaHei"/>
+                <a:latin typeface="Arial"/>
                 <a:ea typeface="Microsoft YaHei"/>
                 <a:cs typeface="Microsoft YaHei"/>
               </a:rPr>
@@ -9244,11 +9244,11 @@
           <a:p>
             <a:pPr algn="ctr"/>
             <a:r>
-              <a:rPr lang="zh-CN" sz="1200">
+              <a:rPr lang="zh-CN" sz="1164">
                 <a:solidFill>
                   <a:srgbClr val="111820"/>
                 </a:solidFill>
-                <a:latin typeface="Microsoft YaHei"/>
+                <a:latin typeface="Arial"/>
                 <a:ea typeface="Microsoft YaHei"/>
                 <a:cs typeface="Microsoft YaHei"/>
               </a:rPr>
@@ -9285,11 +9285,11 @@
           <a:p>
             <a:pPr algn="ctr"/>
             <a:r>
-              <a:rPr lang="zh-CN" sz="1200">
+              <a:rPr lang="zh-CN" sz="1164">
                 <a:solidFill>
                   <a:srgbClr val="111820"/>
                 </a:solidFill>
-                <a:latin typeface="Microsoft YaHei"/>
+                <a:latin typeface="Arial"/>
                 <a:ea typeface="Microsoft YaHei"/>
                 <a:cs typeface="Microsoft YaHei"/>
               </a:rPr>
@@ -9326,11 +9326,11 @@
           <a:p>
             <a:pPr algn="ctr"/>
             <a:r>
-              <a:rPr lang="zh-CN" sz="1200">
+              <a:rPr lang="zh-CN" sz="1164">
                 <a:solidFill>
                   <a:srgbClr val="111820"/>
                 </a:solidFill>
-                <a:latin typeface="Microsoft YaHei"/>
+                <a:latin typeface="Arial"/>
                 <a:ea typeface="Microsoft YaHei"/>
                 <a:cs typeface="Microsoft YaHei"/>
               </a:rPr>
@@ -9367,11 +9367,11 @@
           <a:p>
             <a:pPr algn="ctr"/>
             <a:r>
-              <a:rPr lang="zh-CN" sz="1200">
+              <a:rPr lang="zh-CN" sz="1164">
                 <a:solidFill>
                   <a:srgbClr val="111820"/>
                 </a:solidFill>
-                <a:latin typeface="Microsoft YaHei"/>
+                <a:latin typeface="Arial"/>
                 <a:ea typeface="Microsoft YaHei"/>
                 <a:cs typeface="Microsoft YaHei"/>
               </a:rPr>
@@ -9408,11 +9408,11 @@
           <a:p>
             <a:pPr algn="ctr"/>
             <a:r>
-              <a:rPr lang="zh-CN" sz="1200">
+              <a:rPr lang="zh-CN" sz="1164">
                 <a:solidFill>
                   <a:srgbClr val="111820"/>
                 </a:solidFill>
-                <a:latin typeface="Microsoft YaHei"/>
+                <a:latin typeface="Arial"/>
                 <a:ea typeface="Microsoft YaHei"/>
                 <a:cs typeface="Microsoft YaHei"/>
               </a:rPr>
@@ -9449,11 +9449,11 @@
           <a:p>
             <a:pPr algn="ctr"/>
             <a:r>
-              <a:rPr lang="zh-CN" sz="1200">
+              <a:rPr lang="zh-CN" sz="1164">
                 <a:solidFill>
                   <a:srgbClr val="111820"/>
                 </a:solidFill>
-                <a:latin typeface="Microsoft YaHei"/>
+                <a:latin typeface="Arial"/>
                 <a:ea typeface="Microsoft YaHei"/>
                 <a:cs typeface="Microsoft YaHei"/>
               </a:rPr>
@@ -9490,11 +9490,11 @@
           <a:p>
             <a:pPr algn="ctr"/>
             <a:r>
-              <a:rPr lang="zh-CN" sz="1200">
+              <a:rPr lang="zh-CN" sz="1164">
                 <a:solidFill>
                   <a:srgbClr val="111820"/>
                 </a:solidFill>
-                <a:latin typeface="Microsoft YaHei"/>
+                <a:latin typeface="Arial"/>
                 <a:ea typeface="Microsoft YaHei"/>
                 <a:cs typeface="Microsoft YaHei"/>
               </a:rPr>
@@ -9531,11 +9531,11 @@
           <a:p>
             <a:pPr algn="ctr"/>
             <a:r>
-              <a:rPr lang="zh-CN" sz="1200">
+              <a:rPr lang="zh-CN" sz="1164">
                 <a:solidFill>
                   <a:srgbClr val="111820"/>
                 </a:solidFill>
-                <a:latin typeface="Microsoft YaHei"/>
+                <a:latin typeface="Arial"/>
                 <a:ea typeface="Microsoft YaHei"/>
                 <a:cs typeface="Microsoft YaHei"/>
               </a:rPr>
@@ -9572,11 +9572,11 @@
           <a:p>
             <a:pPr algn="ctr"/>
             <a:r>
-              <a:rPr lang="zh-CN" sz="1200">
+              <a:rPr lang="zh-CN" sz="1164">
                 <a:solidFill>
                   <a:srgbClr val="111820"/>
                 </a:solidFill>
-                <a:latin typeface="Microsoft YaHei"/>
+                <a:latin typeface="Arial"/>
                 <a:ea typeface="Microsoft YaHei"/>
                 <a:cs typeface="Microsoft YaHei"/>
               </a:rPr>
@@ -9613,11 +9613,11 @@
           <a:p>
             <a:pPr algn="ctr"/>
             <a:r>
-              <a:rPr lang="zh-CN" sz="1200">
+              <a:rPr lang="zh-CN" sz="1164">
                 <a:solidFill>
                   <a:srgbClr val="111820"/>
                 </a:solidFill>
-                <a:latin typeface="Microsoft YaHei"/>
+                <a:latin typeface="Arial"/>
                 <a:ea typeface="Microsoft YaHei"/>
                 <a:cs typeface="Microsoft YaHei"/>
               </a:rPr>
@@ -9654,11 +9654,11 @@
           <a:p>
             <a:pPr algn="ctr"/>
             <a:r>
-              <a:rPr lang="zh-CN" sz="1200">
+              <a:rPr lang="zh-CN" sz="1164">
                 <a:solidFill>
                   <a:srgbClr val="111820"/>
                 </a:solidFill>
-                <a:latin typeface="Microsoft YaHei"/>
+                <a:latin typeface="Arial"/>
                 <a:ea typeface="Microsoft YaHei"/>
                 <a:cs typeface="Microsoft YaHei"/>
               </a:rPr>
@@ -9695,11 +9695,11 @@
           <a:p>
             <a:pPr algn="ctr"/>
             <a:r>
-              <a:rPr lang="zh-CN" sz="1200">
+              <a:rPr lang="zh-CN" sz="1164">
                 <a:solidFill>
                   <a:srgbClr val="111820"/>
                 </a:solidFill>
-                <a:latin typeface="Microsoft YaHei"/>
+                <a:latin typeface="Arial"/>
                 <a:ea typeface="Microsoft YaHei"/>
                 <a:cs typeface="Microsoft YaHei"/>
               </a:rPr>
@@ -9736,11 +9736,11 @@
           <a:p>
             <a:pPr algn="l"/>
             <a:r>
-              <a:rPr lang="zh-CN" sz="1760" b="1">
+              <a:rPr lang="zh-CN" sz="1707" b="1">
                 <a:solidFill>
                   <a:srgbClr val="111820"/>
                 </a:solidFill>
-                <a:latin typeface="Microsoft YaHei"/>
+                <a:latin typeface="Arial"/>
                 <a:ea typeface="Microsoft YaHei"/>
                 <a:cs typeface="Microsoft YaHei"/>
               </a:rPr>
@@ -9777,15 +9777,15 @@
           <a:p>
             <a:pPr algn="l"/>
             <a:r>
-              <a:rPr lang="zh-CN" sz="1150">
+              <a:rPr lang="zh-CN" sz="1115">
                 <a:solidFill>
                   <a:srgbClr val="111820"/>
                 </a:solidFill>
-                <a:latin typeface="Microsoft YaHei"/>
-                <a:ea typeface="Microsoft YaHei"/>
-                <a:cs typeface="Microsoft YaHei"/>
-              </a:rPr>
-              <a:t>异步重叠融合</a:t>
+                <a:latin typeface="Arial"/>
+                <a:ea typeface="Microsoft YaHei"/>
+                <a:cs typeface="Microsoft YaHei"/>
+              </a:rPr>
+              <a:t>Async blending</a:t>
             </a:r>
             <a:endParaRPr lang="zh-CN" sz="1150"/>
           </a:p>
@@ -9818,11 +9818,11 @@
           <a:p>
             <a:pPr algn="l"/>
             <a:r>
-              <a:rPr lang="zh-CN" sz="1400">
+              <a:rPr lang="zh-CN" sz="1358">
                 <a:solidFill>
                   <a:srgbClr val="111820"/>
                 </a:solidFill>
-                <a:latin typeface="Microsoft YaHei"/>
+                <a:latin typeface="Arial"/>
                 <a:ea typeface="Microsoft YaHei"/>
                 <a:cs typeface="Microsoft YaHei"/>
               </a:rPr>
@@ -9859,11 +9859,11 @@
           <a:p>
             <a:pPr algn="l"/>
             <a:r>
-              <a:rPr lang="zh-CN" sz="1400">
+              <a:rPr lang="zh-CN" sz="1358">
                 <a:solidFill>
                   <a:srgbClr val="111820"/>
                 </a:solidFill>
-                <a:latin typeface="Microsoft YaHei"/>
+                <a:latin typeface="Arial"/>
                 <a:ea typeface="Microsoft YaHei"/>
                 <a:cs typeface="Microsoft YaHei"/>
               </a:rPr>
@@ -9900,15 +9900,15 @@
           <a:p>
             <a:pPr algn="ctr"/>
             <a:r>
-              <a:rPr lang="zh-CN" sz="1250">
+              <a:rPr lang="zh-CN" sz="1212">
                 <a:solidFill>
                   <a:srgbClr val="FFFFFF"/>
                 </a:solidFill>
-                <a:latin typeface="Microsoft YaHei"/>
-                <a:ea typeface="Microsoft YaHei"/>
-                <a:cs typeface="Microsoft YaHei"/>
-              </a:rPr>
-              <a:t>推理 A</a:t>
+                <a:latin typeface="Arial"/>
+                <a:ea typeface="Microsoft YaHei"/>
+                <a:cs typeface="Microsoft YaHei"/>
+              </a:rPr>
+              <a:t>Infer A</a:t>
             </a:r>
             <a:endParaRPr lang="zh-CN" sz="1250"/>
           </a:p>
@@ -9941,15 +9941,15 @@
           <a:p>
             <a:pPr algn="ctr"/>
             <a:r>
-              <a:rPr lang="zh-CN" sz="1250">
+              <a:rPr lang="zh-CN" sz="1212">
                 <a:solidFill>
                   <a:srgbClr val="FFFFFF"/>
                 </a:solidFill>
-                <a:latin typeface="Microsoft YaHei"/>
-                <a:ea typeface="Microsoft YaHei"/>
-                <a:cs typeface="Microsoft YaHei"/>
-              </a:rPr>
-              <a:t>推理 B</a:t>
+                <a:latin typeface="Arial"/>
+                <a:ea typeface="Microsoft YaHei"/>
+                <a:cs typeface="Microsoft YaHei"/>
+              </a:rPr>
+              <a:t>Infer B</a:t>
             </a:r>
             <a:endParaRPr lang="zh-CN" sz="1250"/>
           </a:p>
@@ -9982,15 +9982,15 @@
           <a:p>
             <a:pPr algn="ctr"/>
             <a:r>
-              <a:rPr lang="zh-CN" sz="1250">
+              <a:rPr lang="zh-CN" sz="1212">
                 <a:solidFill>
                   <a:srgbClr val="FFFFFF"/>
                 </a:solidFill>
-                <a:latin typeface="Microsoft YaHei"/>
-                <a:ea typeface="Microsoft YaHei"/>
-                <a:cs typeface="Microsoft YaHei"/>
-              </a:rPr>
-              <a:t>推理 C</a:t>
+                <a:latin typeface="Arial"/>
+                <a:ea typeface="Microsoft YaHei"/>
+                <a:cs typeface="Microsoft YaHei"/>
+              </a:rPr>
+              <a:t>Infer C</a:t>
             </a:r>
             <a:endParaRPr lang="zh-CN" sz="1250"/>
           </a:p>
@@ -10023,15 +10023,15 @@
           <a:p>
             <a:pPr algn="ctr"/>
             <a:r>
-              <a:rPr lang="zh-CN" sz="1250">
+              <a:rPr lang="zh-CN" sz="1212">
                 <a:solidFill>
                   <a:srgbClr val="FFFFFF"/>
                 </a:solidFill>
-                <a:latin typeface="Microsoft YaHei"/>
-                <a:ea typeface="Microsoft YaHei"/>
-                <a:cs typeface="Microsoft YaHei"/>
-              </a:rPr>
-              <a:t>推理 D</a:t>
+                <a:latin typeface="Arial"/>
+                <a:ea typeface="Microsoft YaHei"/>
+                <a:cs typeface="Microsoft YaHei"/>
+              </a:rPr>
+              <a:t>Infer D</a:t>
             </a:r>
             <a:endParaRPr lang="zh-CN" sz="1250"/>
           </a:p>
@@ -10064,15 +10064,15 @@
           <a:p>
             <a:pPr algn="ctr"/>
             <a:r>
-              <a:rPr lang="zh-CN" sz="1200">
+              <a:rPr lang="zh-CN" sz="1164">
                 <a:solidFill>
                   <a:srgbClr val="111820"/>
                 </a:solidFill>
-                <a:latin typeface="Microsoft YaHei"/>
-                <a:ea typeface="Microsoft YaHei"/>
-                <a:cs typeface="Microsoft YaHei"/>
-              </a:rPr>
-              <a:t>等待</a:t>
+                <a:latin typeface="Arial"/>
+                <a:ea typeface="Microsoft YaHei"/>
+                <a:cs typeface="Microsoft YaHei"/>
+              </a:rPr>
+              <a:t>Wait</a:t>
             </a:r>
             <a:endParaRPr lang="zh-CN" sz="1200"/>
           </a:p>
@@ -10105,15 +10105,15 @@
           <a:p>
             <a:pPr algn="ctr"/>
             <a:r>
-              <a:rPr lang="zh-CN" sz="1200">
+              <a:rPr lang="zh-CN" sz="1164">
                 <a:solidFill>
                   <a:srgbClr val="111820"/>
                 </a:solidFill>
-                <a:latin typeface="Microsoft YaHei"/>
-                <a:ea typeface="Microsoft YaHei"/>
-                <a:cs typeface="Microsoft YaHei"/>
-              </a:rPr>
-              <a:t>等待</a:t>
+                <a:latin typeface="Arial"/>
+                <a:ea typeface="Microsoft YaHei"/>
+                <a:cs typeface="Microsoft YaHei"/>
+              </a:rPr>
+              <a:t>Wait</a:t>
             </a:r>
             <a:endParaRPr lang="zh-CN" sz="1200"/>
           </a:p>
@@ -10146,11 +10146,11 @@
           <a:p>
             <a:pPr algn="ctr"/>
             <a:r>
-              <a:rPr lang="zh-CN" sz="1200">
+              <a:rPr lang="zh-CN" sz="1164">
                 <a:solidFill>
                   <a:srgbClr val="111820"/>
                 </a:solidFill>
-                <a:latin typeface="Microsoft YaHei"/>
+                <a:latin typeface="Arial"/>
                 <a:ea typeface="Microsoft YaHei"/>
                 <a:cs typeface="Microsoft YaHei"/>
               </a:rPr>
@@ -10187,11 +10187,11 @@
           <a:p>
             <a:pPr algn="ctr"/>
             <a:r>
-              <a:rPr lang="zh-CN" sz="1200">
+              <a:rPr lang="zh-CN" sz="1164">
                 <a:solidFill>
                   <a:srgbClr val="111820"/>
                 </a:solidFill>
-                <a:latin typeface="Microsoft YaHei"/>
+                <a:latin typeface="Arial"/>
                 <a:ea typeface="Microsoft YaHei"/>
                 <a:cs typeface="Microsoft YaHei"/>
               </a:rPr>
@@ -10228,11 +10228,11 @@
           <a:p>
             <a:pPr algn="ctr"/>
             <a:r>
-              <a:rPr lang="zh-CN" sz="1200">
+              <a:rPr lang="zh-CN" sz="1164">
                 <a:solidFill>
                   <a:srgbClr val="111820"/>
                 </a:solidFill>
-                <a:latin typeface="Microsoft YaHei"/>
+                <a:latin typeface="Arial"/>
                 <a:ea typeface="Microsoft YaHei"/>
                 <a:cs typeface="Microsoft YaHei"/>
               </a:rPr>
@@ -10269,11 +10269,11 @@
           <a:p>
             <a:pPr algn="ctr"/>
             <a:r>
-              <a:rPr lang="zh-CN" sz="1200">
+              <a:rPr lang="zh-CN" sz="1164">
                 <a:solidFill>
                   <a:srgbClr val="111820"/>
                 </a:solidFill>
-                <a:latin typeface="Microsoft YaHei"/>
+                <a:latin typeface="Arial"/>
                 <a:ea typeface="Microsoft YaHei"/>
                 <a:cs typeface="Microsoft YaHei"/>
               </a:rPr>
@@ -10310,11 +10310,11 @@
           <a:p>
             <a:pPr algn="ctr"/>
             <a:r>
-              <a:rPr lang="zh-CN" sz="1200">
+              <a:rPr lang="zh-CN" sz="1164">
                 <a:solidFill>
                   <a:srgbClr val="111820"/>
                 </a:solidFill>
-                <a:latin typeface="Microsoft YaHei"/>
+                <a:latin typeface="Arial"/>
                 <a:ea typeface="Microsoft YaHei"/>
                 <a:cs typeface="Microsoft YaHei"/>
               </a:rPr>
@@ -10351,11 +10351,11 @@
           <a:p>
             <a:pPr algn="ctr"/>
             <a:r>
-              <a:rPr lang="zh-CN" sz="1200">
+              <a:rPr lang="zh-CN" sz="1164">
                 <a:solidFill>
                   <a:srgbClr val="111820"/>
                 </a:solidFill>
-                <a:latin typeface="Microsoft YaHei"/>
+                <a:latin typeface="Arial"/>
                 <a:ea typeface="Microsoft YaHei"/>
                 <a:cs typeface="Microsoft YaHei"/>
               </a:rPr>
@@ -10392,11 +10392,11 @@
           <a:p>
             <a:pPr algn="ctr"/>
             <a:r>
-              <a:rPr lang="zh-CN" sz="1200">
+              <a:rPr lang="zh-CN" sz="1164">
                 <a:solidFill>
                   <a:srgbClr val="111820"/>
                 </a:solidFill>
-                <a:latin typeface="Microsoft YaHei"/>
+                <a:latin typeface="Arial"/>
                 <a:ea typeface="Microsoft YaHei"/>
                 <a:cs typeface="Microsoft YaHei"/>
               </a:rPr>
@@ -10433,11 +10433,11 @@
           <a:p>
             <a:pPr algn="ctr"/>
             <a:r>
-              <a:rPr lang="zh-CN" sz="1200">
+              <a:rPr lang="zh-CN" sz="1164">
                 <a:solidFill>
                   <a:srgbClr val="245C9F"/>
                 </a:solidFill>
-                <a:latin typeface="Microsoft YaHei"/>
+                <a:latin typeface="Arial"/>
                 <a:ea typeface="Microsoft YaHei"/>
                 <a:cs typeface="Microsoft YaHei"/>
               </a:rPr>
@@ -10474,11 +10474,11 @@
           <a:p>
             <a:pPr algn="ctr"/>
             <a:r>
-              <a:rPr lang="zh-CN" sz="1200">
+              <a:rPr lang="zh-CN" sz="1164">
                 <a:solidFill>
                   <a:srgbClr val="111820"/>
                 </a:solidFill>
-                <a:latin typeface="Microsoft YaHei"/>
+                <a:latin typeface="Arial"/>
                 <a:ea typeface="Microsoft YaHei"/>
                 <a:cs typeface="Microsoft YaHei"/>
               </a:rPr>
@@ -10515,11 +10515,11 @@
           <a:p>
             <a:pPr algn="ctr"/>
             <a:r>
-              <a:rPr lang="zh-CN" sz="1200">
+              <a:rPr lang="zh-CN" sz="1164">
                 <a:solidFill>
                   <a:srgbClr val="245C9F"/>
                 </a:solidFill>
-                <a:latin typeface="Microsoft YaHei"/>
+                <a:latin typeface="Arial"/>
                 <a:ea typeface="Microsoft YaHei"/>
                 <a:cs typeface="Microsoft YaHei"/>
               </a:rPr>
@@ -10556,11 +10556,11 @@
           <a:p>
             <a:pPr algn="ctr"/>
             <a:r>
-              <a:rPr lang="zh-CN" sz="1200">
+              <a:rPr lang="zh-CN" sz="1164">
                 <a:solidFill>
                   <a:srgbClr val="111820"/>
                 </a:solidFill>
-                <a:latin typeface="Microsoft YaHei"/>
+                <a:latin typeface="Arial"/>
                 <a:ea typeface="Microsoft YaHei"/>
                 <a:cs typeface="Microsoft YaHei"/>
               </a:rPr>
@@ -10597,11 +10597,11 @@
           <a:p>
             <a:pPr algn="ctr"/>
             <a:r>
-              <a:rPr lang="zh-CN" sz="1200">
+              <a:rPr lang="zh-CN" sz="1164">
                 <a:solidFill>
                   <a:srgbClr val="245C9F"/>
                 </a:solidFill>
-                <a:latin typeface="Microsoft YaHei"/>
+                <a:latin typeface="Arial"/>
                 <a:ea typeface="Microsoft YaHei"/>
                 <a:cs typeface="Microsoft YaHei"/>
               </a:rPr>
@@ -10638,11 +10638,11 @@
           <a:p>
             <a:pPr algn="ctr"/>
             <a:r>
-              <a:rPr lang="zh-CN" sz="1200">
+              <a:rPr lang="zh-CN" sz="1164">
                 <a:solidFill>
                   <a:srgbClr val="111820"/>
                 </a:solidFill>
-                <a:latin typeface="Microsoft YaHei"/>
+                <a:latin typeface="Arial"/>
                 <a:ea typeface="Microsoft YaHei"/>
                 <a:cs typeface="Microsoft YaHei"/>
               </a:rPr>
@@ -10679,11 +10679,11 @@
           <a:p>
             <a:pPr algn="ctr"/>
             <a:r>
-              <a:rPr lang="zh-CN" sz="1200">
+              <a:rPr lang="zh-CN" sz="1164">
                 <a:solidFill>
                   <a:srgbClr val="111820"/>
                 </a:solidFill>
-                <a:latin typeface="Microsoft YaHei"/>
+                <a:latin typeface="Arial"/>
                 <a:ea typeface="Microsoft YaHei"/>
                 <a:cs typeface="Microsoft YaHei"/>
               </a:rPr>
@@ -10720,11 +10720,11 @@
           <a:p>
             <a:pPr algn="ctr"/>
             <a:r>
-              <a:rPr lang="zh-CN" sz="1200">
+              <a:rPr lang="zh-CN" sz="1164">
                 <a:solidFill>
                   <a:srgbClr val="245C9F"/>
                 </a:solidFill>
-                <a:latin typeface="Microsoft YaHei"/>
+                <a:latin typeface="Arial"/>
                 <a:ea typeface="Microsoft YaHei"/>
                 <a:cs typeface="Microsoft YaHei"/>
               </a:rPr>
@@ -10761,11 +10761,11 @@
           <a:p>
             <a:pPr algn="ctr"/>
             <a:r>
-              <a:rPr lang="zh-CN" sz="1200">
+              <a:rPr lang="zh-CN" sz="1164">
                 <a:solidFill>
                   <a:srgbClr val="111820"/>
                 </a:solidFill>
-                <a:latin typeface="Microsoft YaHei"/>
+                <a:latin typeface="Arial"/>
                 <a:ea typeface="Microsoft YaHei"/>
                 <a:cs typeface="Microsoft YaHei"/>
               </a:rPr>
@@ -10802,11 +10802,11 @@
           <a:p>
             <a:pPr algn="ctr"/>
             <a:r>
-              <a:rPr lang="zh-CN" sz="1200">
+              <a:rPr lang="zh-CN" sz="1164">
                 <a:solidFill>
                   <a:srgbClr val="245C9F"/>
                 </a:solidFill>
-                <a:latin typeface="Microsoft YaHei"/>
+                <a:latin typeface="Arial"/>
                 <a:ea typeface="Microsoft YaHei"/>
                 <a:cs typeface="Microsoft YaHei"/>
               </a:rPr>
@@ -10843,11 +10843,11 @@
           <a:p>
             <a:pPr algn="ctr"/>
             <a:r>
-              <a:rPr lang="zh-CN" sz="1200">
+              <a:rPr lang="zh-CN" sz="1164">
                 <a:solidFill>
                   <a:srgbClr val="111820"/>
                 </a:solidFill>
-                <a:latin typeface="Microsoft YaHei"/>
+                <a:latin typeface="Arial"/>
                 <a:ea typeface="Microsoft YaHei"/>
                 <a:cs typeface="Microsoft YaHei"/>
               </a:rPr>
@@ -10884,11 +10884,11 @@
           <a:p>
             <a:pPr algn="ctr"/>
             <a:r>
-              <a:rPr lang="zh-CN" sz="1200">
+              <a:rPr lang="zh-CN" sz="1164">
                 <a:solidFill>
                   <a:srgbClr val="245C9F"/>
                 </a:solidFill>
-                <a:latin typeface="Microsoft YaHei"/>
+                <a:latin typeface="Arial"/>
                 <a:ea typeface="Microsoft YaHei"/>
                 <a:cs typeface="Microsoft YaHei"/>
               </a:rPr>
@@ -10925,11 +10925,11 @@
           <a:p>
             <a:pPr algn="ctr"/>
             <a:r>
-              <a:rPr lang="zh-CN" sz="1200">
+              <a:rPr lang="zh-CN" sz="1164">
                 <a:solidFill>
                   <a:srgbClr val="111820"/>
                 </a:solidFill>
-                <a:latin typeface="Microsoft YaHei"/>
+                <a:latin typeface="Arial"/>
                 <a:ea typeface="Microsoft YaHei"/>
                 <a:cs typeface="Microsoft YaHei"/>
               </a:rPr>
@@ -10966,11 +10966,11 @@
           <a:p>
             <a:pPr algn="ctr"/>
             <a:r>
-              <a:rPr lang="zh-CN" sz="1200">
+              <a:rPr lang="zh-CN" sz="1164">
                 <a:solidFill>
                   <a:srgbClr val="111820"/>
                 </a:solidFill>
-                <a:latin typeface="Microsoft YaHei"/>
+                <a:latin typeface="Arial"/>
                 <a:ea typeface="Microsoft YaHei"/>
                 <a:cs typeface="Microsoft YaHei"/>
               </a:rPr>
@@ -11007,11 +11007,11 @@
           <a:p>
             <a:pPr algn="ctr"/>
             <a:r>
-              <a:rPr lang="zh-CN" sz="1200">
+              <a:rPr lang="zh-CN" sz="1164">
                 <a:solidFill>
                   <a:srgbClr val="245C9F"/>
                 </a:solidFill>
-                <a:latin typeface="Microsoft YaHei"/>
+                <a:latin typeface="Arial"/>
                 <a:ea typeface="Microsoft YaHei"/>
                 <a:cs typeface="Microsoft YaHei"/>
               </a:rPr>
@@ -11048,11 +11048,11 @@
           <a:p>
             <a:pPr algn="ctr"/>
             <a:r>
-              <a:rPr lang="zh-CN" sz="1200">
+              <a:rPr lang="zh-CN" sz="1164">
                 <a:solidFill>
                   <a:srgbClr val="111820"/>
                 </a:solidFill>
-                <a:latin typeface="Microsoft YaHei"/>
+                <a:latin typeface="Arial"/>
                 <a:ea typeface="Microsoft YaHei"/>
                 <a:cs typeface="Microsoft YaHei"/>
               </a:rPr>
@@ -11089,11 +11089,11 @@
           <a:p>
             <a:pPr algn="ctr"/>
             <a:r>
-              <a:rPr lang="zh-CN" sz="1200">
+              <a:rPr lang="zh-CN" sz="1164">
                 <a:solidFill>
                   <a:srgbClr val="245C9F"/>
                 </a:solidFill>
-                <a:latin typeface="Microsoft YaHei"/>
+                <a:latin typeface="Arial"/>
                 <a:ea typeface="Microsoft YaHei"/>
                 <a:cs typeface="Microsoft YaHei"/>
               </a:rPr>
@@ -11130,11 +11130,11 @@
           <a:p>
             <a:pPr algn="l"/>
             <a:r>
-              <a:rPr lang="zh-CN" sz="1760" b="1">
+              <a:rPr lang="zh-CN" sz="1707" b="1">
                 <a:solidFill>
                   <a:srgbClr val="111820"/>
                 </a:solidFill>
-                <a:latin typeface="Microsoft YaHei"/>
+                <a:latin typeface="Arial"/>
                 <a:ea typeface="Microsoft YaHei"/>
                 <a:cs typeface="Microsoft YaHei"/>
               </a:rPr>
@@ -11171,15 +11171,15 @@
           <a:p>
             <a:pPr algn="l"/>
             <a:r>
-              <a:rPr lang="zh-CN" sz="1150">
+              <a:rPr lang="zh-CN" sz="1063">
                 <a:solidFill>
                   <a:srgbClr val="111820"/>
                 </a:solidFill>
-                <a:latin typeface="Microsoft YaHei"/>
-                <a:ea typeface="Microsoft YaHei"/>
-                <a:cs typeface="Microsoft YaHei"/>
-              </a:rPr>
-              <a:t>同步阻塞执行</a:t>
+                <a:latin typeface="Arial"/>
+                <a:ea typeface="Microsoft YaHei"/>
+                <a:cs typeface="Microsoft YaHei"/>
+              </a:rPr>
+              <a:t>Blocking execution</a:t>
             </a:r>
             <a:endParaRPr lang="zh-CN" sz="1150"/>
           </a:p>
@@ -11212,11 +11212,11 @@
           <a:p>
             <a:pPr algn="l"/>
             <a:r>
-              <a:rPr lang="zh-CN" sz="1400">
+              <a:rPr lang="zh-CN" sz="1358">
                 <a:solidFill>
                   <a:srgbClr val="111820"/>
                 </a:solidFill>
-                <a:latin typeface="Microsoft YaHei"/>
+                <a:latin typeface="Arial"/>
                 <a:ea typeface="Microsoft YaHei"/>
                 <a:cs typeface="Microsoft YaHei"/>
               </a:rPr>
@@ -11253,11 +11253,11 @@
           <a:p>
             <a:pPr algn="l"/>
             <a:r>
-              <a:rPr lang="zh-CN" sz="1400">
+              <a:rPr lang="zh-CN" sz="1358">
                 <a:solidFill>
                   <a:srgbClr val="111820"/>
                 </a:solidFill>
-                <a:latin typeface="Microsoft YaHei"/>
+                <a:latin typeface="Arial"/>
                 <a:ea typeface="Microsoft YaHei"/>
                 <a:cs typeface="Microsoft YaHei"/>
               </a:rPr>
@@ -11294,15 +11294,15 @@
           <a:p>
             <a:pPr algn="ctr"/>
             <a:r>
-              <a:rPr lang="zh-CN" sz="1250">
+              <a:rPr lang="zh-CN" sz="1212">
                 <a:solidFill>
                   <a:srgbClr val="FFFFFF"/>
                 </a:solidFill>
-                <a:latin typeface="Microsoft YaHei"/>
-                <a:ea typeface="Microsoft YaHei"/>
-                <a:cs typeface="Microsoft YaHei"/>
-              </a:rPr>
-              <a:t>推理 A</a:t>
+                <a:latin typeface="Arial"/>
+                <a:ea typeface="Microsoft YaHei"/>
+                <a:cs typeface="Microsoft YaHei"/>
+              </a:rPr>
+              <a:t>Infer A</a:t>
             </a:r>
             <a:endParaRPr lang="zh-CN" sz="1250"/>
           </a:p>
@@ -11335,15 +11335,15 @@
           <a:p>
             <a:pPr algn="ctr"/>
             <a:r>
-              <a:rPr lang="zh-CN" sz="1250">
+              <a:rPr lang="zh-CN" sz="1212">
                 <a:solidFill>
                   <a:srgbClr val="FFFFFF"/>
                 </a:solidFill>
-                <a:latin typeface="Microsoft YaHei"/>
-                <a:ea typeface="Microsoft YaHei"/>
-                <a:cs typeface="Microsoft YaHei"/>
-              </a:rPr>
-              <a:t>推理 B</a:t>
+                <a:latin typeface="Arial"/>
+                <a:ea typeface="Microsoft YaHei"/>
+                <a:cs typeface="Microsoft YaHei"/>
+              </a:rPr>
+              <a:t>Infer B</a:t>
             </a:r>
             <a:endParaRPr lang="zh-CN" sz="1250"/>
           </a:p>
@@ -11376,15 +11376,15 @@
           <a:p>
             <a:pPr algn="ctr"/>
             <a:r>
-              <a:rPr lang="zh-CN" sz="1200">
+              <a:rPr lang="zh-CN" sz="1164">
                 <a:solidFill>
                   <a:srgbClr val="111820"/>
                 </a:solidFill>
-                <a:latin typeface="Microsoft YaHei"/>
-                <a:ea typeface="Microsoft YaHei"/>
-                <a:cs typeface="Microsoft YaHei"/>
-              </a:rPr>
-              <a:t>等待</a:t>
+                <a:latin typeface="Arial"/>
+                <a:ea typeface="Microsoft YaHei"/>
+                <a:cs typeface="Microsoft YaHei"/>
+              </a:rPr>
+              <a:t>Wait</a:t>
             </a:r>
             <a:endParaRPr lang="zh-CN" sz="1200"/>
           </a:p>
@@ -11417,15 +11417,15 @@
           <a:p>
             <a:pPr algn="ctr"/>
             <a:r>
-              <a:rPr lang="zh-CN" sz="1200">
+              <a:rPr lang="zh-CN" sz="1164">
                 <a:solidFill>
                   <a:srgbClr val="111820"/>
                 </a:solidFill>
-                <a:latin typeface="Microsoft YaHei"/>
-                <a:ea typeface="Microsoft YaHei"/>
-                <a:cs typeface="Microsoft YaHei"/>
-              </a:rPr>
-              <a:t>等待</a:t>
+                <a:latin typeface="Arial"/>
+                <a:ea typeface="Microsoft YaHei"/>
+                <a:cs typeface="Microsoft YaHei"/>
+              </a:rPr>
+              <a:t>Wait</a:t>
             </a:r>
             <a:endParaRPr lang="zh-CN" sz="1200"/>
           </a:p>
@@ -11458,11 +11458,11 @@
           <a:p>
             <a:pPr algn="ctr"/>
             <a:r>
-              <a:rPr lang="zh-CN" sz="1200">
+              <a:rPr lang="zh-CN" sz="1164">
                 <a:solidFill>
                   <a:srgbClr val="111820"/>
                 </a:solidFill>
-                <a:latin typeface="Microsoft YaHei"/>
+                <a:latin typeface="Arial"/>
                 <a:ea typeface="Microsoft YaHei"/>
                 <a:cs typeface="Microsoft YaHei"/>
               </a:rPr>
@@ -11499,11 +11499,11 @@
           <a:p>
             <a:pPr algn="ctr"/>
             <a:r>
-              <a:rPr lang="zh-CN" sz="1200">
+              <a:rPr lang="zh-CN" sz="1164">
                 <a:solidFill>
                   <a:srgbClr val="111820"/>
                 </a:solidFill>
-                <a:latin typeface="Microsoft YaHei"/>
+                <a:latin typeface="Arial"/>
                 <a:ea typeface="Microsoft YaHei"/>
                 <a:cs typeface="Microsoft YaHei"/>
               </a:rPr>
@@ -11540,11 +11540,11 @@
           <a:p>
             <a:pPr algn="ctr"/>
             <a:r>
-              <a:rPr lang="zh-CN" sz="1200">
+              <a:rPr lang="zh-CN" sz="1164">
                 <a:solidFill>
                   <a:srgbClr val="111820"/>
                 </a:solidFill>
-                <a:latin typeface="Microsoft YaHei"/>
+                <a:latin typeface="Arial"/>
                 <a:ea typeface="Microsoft YaHei"/>
                 <a:cs typeface="Microsoft YaHei"/>
               </a:rPr>
@@ -11581,11 +11581,11 @@
           <a:p>
             <a:pPr algn="ctr"/>
             <a:r>
-              <a:rPr lang="zh-CN" sz="1200">
+              <a:rPr lang="zh-CN" sz="1164">
                 <a:solidFill>
                   <a:srgbClr val="111820"/>
                 </a:solidFill>
-                <a:latin typeface="Microsoft YaHei"/>
+                <a:latin typeface="Arial"/>
                 <a:ea typeface="Microsoft YaHei"/>
                 <a:cs typeface="Microsoft YaHei"/>
               </a:rPr>
@@ -11622,11 +11622,11 @@
           <a:p>
             <a:pPr algn="ctr"/>
             <a:r>
-              <a:rPr lang="zh-CN" sz="1200">
+              <a:rPr lang="zh-CN" sz="1164">
                 <a:solidFill>
                   <a:srgbClr val="111820"/>
                 </a:solidFill>
-                <a:latin typeface="Microsoft YaHei"/>
+                <a:latin typeface="Arial"/>
                 <a:ea typeface="Microsoft YaHei"/>
                 <a:cs typeface="Microsoft YaHei"/>
               </a:rPr>
@@ -11663,11 +11663,11 @@
           <a:p>
             <a:pPr algn="ctr"/>
             <a:r>
-              <a:rPr lang="zh-CN" sz="1200">
+              <a:rPr lang="zh-CN" sz="1164">
                 <a:solidFill>
                   <a:srgbClr val="111820"/>
                 </a:solidFill>
-                <a:latin typeface="Microsoft YaHei"/>
+                <a:latin typeface="Arial"/>
                 <a:ea typeface="Microsoft YaHei"/>
                 <a:cs typeface="Microsoft YaHei"/>
               </a:rPr>
@@ -11704,11 +11704,11 @@
           <a:p>
             <a:pPr algn="ctr"/>
             <a:r>
-              <a:rPr lang="zh-CN" sz="1200">
+              <a:rPr lang="zh-CN" sz="1164">
                 <a:solidFill>
                   <a:srgbClr val="111820"/>
                 </a:solidFill>
-                <a:latin typeface="Microsoft YaHei"/>
+                <a:latin typeface="Arial"/>
                 <a:ea typeface="Microsoft YaHei"/>
                 <a:cs typeface="Microsoft YaHei"/>
               </a:rPr>
@@ -11745,11 +11745,11 @@
           <a:p>
             <a:pPr algn="ctr"/>
             <a:r>
-              <a:rPr lang="zh-CN" sz="1200">
+              <a:rPr lang="zh-CN" sz="1164">
                 <a:solidFill>
                   <a:srgbClr val="111820"/>
                 </a:solidFill>
-                <a:latin typeface="Microsoft YaHei"/>
+                <a:latin typeface="Arial"/>
                 <a:ea typeface="Microsoft YaHei"/>
                 <a:cs typeface="Microsoft YaHei"/>
               </a:rPr>
@@ -11786,11 +11786,11 @@
           <a:p>
             <a:pPr algn="ctr"/>
             <a:r>
-              <a:rPr lang="zh-CN" sz="1200">
+              <a:rPr lang="zh-CN" sz="1164">
                 <a:solidFill>
                   <a:srgbClr val="111820"/>
                 </a:solidFill>
-                <a:latin typeface="Microsoft YaHei"/>
+                <a:latin typeface="Arial"/>
                 <a:ea typeface="Microsoft YaHei"/>
                 <a:cs typeface="Microsoft YaHei"/>
               </a:rPr>
@@ -11827,11 +11827,11 @@
           <a:p>
             <a:pPr algn="ctr"/>
             <a:r>
-              <a:rPr lang="zh-CN" sz="1200">
+              <a:rPr lang="zh-CN" sz="1164">
                 <a:solidFill>
                   <a:srgbClr val="111820"/>
                 </a:solidFill>
-                <a:latin typeface="Microsoft YaHei"/>
+                <a:latin typeface="Arial"/>
                 <a:ea typeface="Microsoft YaHei"/>
                 <a:cs typeface="Microsoft YaHei"/>
               </a:rPr>
@@ -11868,11 +11868,11 @@
           <a:p>
             <a:pPr algn="ctr"/>
             <a:r>
-              <a:rPr lang="zh-CN" sz="1200">
+              <a:rPr lang="zh-CN" sz="1164">
                 <a:solidFill>
                   <a:srgbClr val="111820"/>
                 </a:solidFill>
-                <a:latin typeface="Microsoft YaHei"/>
+                <a:latin typeface="Arial"/>
                 <a:ea typeface="Microsoft YaHei"/>
                 <a:cs typeface="Microsoft YaHei"/>
               </a:rPr>
@@ -11909,11 +11909,11 @@
           <a:p>
             <a:pPr algn="ctr"/>
             <a:r>
-              <a:rPr lang="zh-CN" sz="1200">
+              <a:rPr lang="zh-CN" sz="1164">
                 <a:solidFill>
                   <a:srgbClr val="111820"/>
                 </a:solidFill>
-                <a:latin typeface="Microsoft YaHei"/>
+                <a:latin typeface="Arial"/>
                 <a:ea typeface="Microsoft YaHei"/>
                 <a:cs typeface="Microsoft YaHei"/>
               </a:rPr>
@@ -11950,15 +11950,15 @@
           <a:p>
             <a:pPr algn="ctr"/>
             <a:r>
-              <a:rPr lang="zh-CN" sz="1200">
+              <a:rPr lang="zh-CN" sz="1164">
                 <a:solidFill>
                   <a:srgbClr val="111820"/>
                 </a:solidFill>
-                <a:latin typeface="Microsoft YaHei"/>
-                <a:ea typeface="Microsoft YaHei"/>
-                <a:cs typeface="Microsoft YaHei"/>
-              </a:rPr>
-              <a:t>等待</a:t>
+                <a:latin typeface="Arial"/>
+                <a:ea typeface="Microsoft YaHei"/>
+                <a:cs typeface="Microsoft YaHei"/>
+              </a:rPr>
+              <a:t>Wait</a:t>
             </a:r>
             <a:endParaRPr lang="zh-CN" sz="1200"/>
           </a:p>
@@ -11991,15 +11991,15 @@
           <a:p>
             <a:pPr algn="ctr"/>
             <a:r>
-              <a:rPr lang="zh-CN" sz="1200">
+              <a:rPr lang="zh-CN" sz="1164">
                 <a:solidFill>
                   <a:srgbClr val="111820"/>
                 </a:solidFill>
-                <a:latin typeface="Microsoft YaHei"/>
-                <a:ea typeface="Microsoft YaHei"/>
-                <a:cs typeface="Microsoft YaHei"/>
-              </a:rPr>
-              <a:t>等待</a:t>
+                <a:latin typeface="Arial"/>
+                <a:ea typeface="Microsoft YaHei"/>
+                <a:cs typeface="Microsoft YaHei"/>
+              </a:rPr>
+              <a:t>Wait</a:t>
             </a:r>
             <a:endParaRPr lang="zh-CN" sz="1200"/>
           </a:p>
@@ -12032,11 +12032,11 @@
           <a:p>
             <a:pPr algn="ctr"/>
             <a:r>
-              <a:rPr lang="zh-CN" sz="1200">
+              <a:rPr lang="zh-CN" sz="1164">
                 <a:solidFill>
                   <a:srgbClr val="111820"/>
                 </a:solidFill>
-                <a:latin typeface="Microsoft YaHei"/>
+                <a:latin typeface="Arial"/>
                 <a:ea typeface="Microsoft YaHei"/>
                 <a:cs typeface="Microsoft YaHei"/>
               </a:rPr>
@@ -12073,11 +12073,11 @@
           <a:p>
             <a:pPr algn="ctr"/>
             <a:r>
-              <a:rPr lang="zh-CN" sz="1200">
+              <a:rPr lang="zh-CN" sz="1164">
                 <a:solidFill>
                   <a:srgbClr val="111820"/>
                 </a:solidFill>
-                <a:latin typeface="Microsoft YaHei"/>
+                <a:latin typeface="Arial"/>
                 <a:ea typeface="Microsoft YaHei"/>
                 <a:cs typeface="Microsoft YaHei"/>
               </a:rPr>
@@ -12114,15 +12114,15 @@
           <a:p>
             <a:pPr algn="l"/>
             <a:r>
-              <a:rPr lang="zh-CN" sz="1150">
+              <a:rPr lang="zh-CN" sz="1115">
                 <a:solidFill>
                   <a:srgbClr val="111820"/>
                 </a:solidFill>
-                <a:latin typeface="Microsoft YaHei"/>
-                <a:ea typeface="Microsoft YaHei"/>
-                <a:cs typeface="Microsoft YaHei"/>
-              </a:rPr>
-              <a:t>s=4 → t=6：裁掉 B0、B1，从 B2 接管</a:t>
+                <a:latin typeface="Arial"/>
+                <a:ea typeface="Microsoft YaHei"/>
+                <a:cs typeface="Microsoft YaHei"/>
+              </a:rPr>
+              <a:t>s=4 → t=6: discard B0/B1; apply B2 onward</a:t>
             </a:r>
             <a:endParaRPr lang="zh-CN" sz="1150"/>
           </a:p>
@@ -12155,15 +12155,15 @@
           <a:p>
             <a:pPr algn="l"/>
             <a:r>
-              <a:rPr lang="zh-CN" sz="1150">
+              <a:rPr lang="zh-CN" sz="1115">
                 <a:solidFill>
                   <a:srgbClr val="111820"/>
                 </a:solidFill>
-                <a:latin typeface="Microsoft YaHei"/>
-                <a:ea typeface="Microsoft YaHei"/>
-                <a:cs typeface="Microsoft YaHei"/>
-              </a:rPr>
-              <a:t>前六维加权融合；夹爪按 α ≥ 0.5 切换</a:t>
+                <a:latin typeface="Arial"/>
+                <a:ea typeface="Microsoft YaHei"/>
+                <a:cs typeface="Microsoft YaHei"/>
+              </a:rPr>
+              <a:t>Blend six pose dimensions; switch gripper at α ≥ 0.5</a:t>
             </a:r>
             <a:endParaRPr lang="zh-CN" sz="1150"/>
           </a:p>
@@ -12196,15 +12196,15 @@
           <a:p>
             <a:pPr algn="l"/>
             <a:r>
-              <a:rPr lang="zh-CN" sz="1150">
+              <a:rPr lang="zh-CN" sz="1115">
                 <a:solidFill>
                   <a:srgbClr val="111820"/>
                 </a:solidFill>
-                <a:latin typeface="Microsoft YaHei"/>
-                <a:ea typeface="Microsoft YaHei"/>
-                <a:cs typeface="Microsoft YaHei"/>
-              </a:rPr>
-              <a:t>动作块用尽后请求；等待时控制步不推进</a:t>
+                <a:latin typeface="Arial"/>
+                <a:ea typeface="Microsoft YaHei"/>
+                <a:cs typeface="Microsoft YaHei"/>
+              </a:rPr>
+              <a:t>Request after chunk exhaustion; no control steps while waiting</a:t>
             </a:r>
             <a:endParaRPr lang="zh-CN" sz="1150"/>
           </a:p>
@@ -12237,15 +12237,15 @@
           <a:p>
             <a:pPr algn="l"/>
             <a:r>
-              <a:rPr lang="zh-CN" sz="1200">
+              <a:rPr lang="zh-CN" sz="1164">
                 <a:solidFill>
                   <a:srgbClr val="111820"/>
                 </a:solidFill>
-                <a:latin typeface="Microsoft YaHei"/>
-                <a:ea typeface="Microsoft YaHei"/>
-                <a:cs typeface="Microsoft YaHei"/>
-              </a:rPr>
-              <a:t>原动作</a:t>
+                <a:latin typeface="Arial"/>
+                <a:ea typeface="Microsoft YaHei"/>
+                <a:cs typeface="Microsoft YaHei"/>
+              </a:rPr>
+              <a:t>Old actions</a:t>
             </a:r>
             <a:endParaRPr lang="zh-CN" sz="1200"/>
           </a:p>
@@ -12278,15 +12278,15 @@
           <a:p>
             <a:pPr algn="l"/>
             <a:r>
-              <a:rPr lang="zh-CN" sz="1200">
+              <a:rPr lang="zh-CN" sz="1164">
                 <a:solidFill>
                   <a:srgbClr val="111820"/>
                 </a:solidFill>
-                <a:latin typeface="Microsoft YaHei"/>
-                <a:ea typeface="Microsoft YaHei"/>
-                <a:cs typeface="Microsoft YaHei"/>
-              </a:rPr>
-              <a:t>新动作</a:t>
+                <a:latin typeface="Arial"/>
+                <a:ea typeface="Microsoft YaHei"/>
+                <a:cs typeface="Microsoft YaHei"/>
+              </a:rPr>
+              <a:t>New actions</a:t>
             </a:r>
             <a:endParaRPr lang="zh-CN" sz="1200"/>
           </a:p>
@@ -12319,15 +12319,15 @@
           <a:p>
             <a:pPr algn="l"/>
             <a:r>
-              <a:rPr lang="zh-CN" sz="1200">
+              <a:rPr lang="zh-CN" sz="1164">
                 <a:solidFill>
                   <a:srgbClr val="111820"/>
                 </a:solidFill>
-                <a:latin typeface="Microsoft YaHei"/>
-                <a:ea typeface="Microsoft YaHei"/>
-                <a:cs typeface="Microsoft YaHei"/>
-              </a:rPr>
-              <a:t>融合窗</a:t>
+                <a:latin typeface="Arial"/>
+                <a:ea typeface="Microsoft YaHei"/>
+                <a:cs typeface="Microsoft YaHei"/>
+              </a:rPr>
+              <a:t>Blend window</a:t>
             </a:r>
             <a:endParaRPr lang="zh-CN" sz="1200"/>
           </a:p>
@@ -12360,15 +12360,15 @@
           <a:p>
             <a:pPr algn="l"/>
             <a:r>
-              <a:rPr lang="zh-CN" sz="1200">
+              <a:rPr lang="zh-CN" sz="1164">
                 <a:solidFill>
                   <a:srgbClr val="111820"/>
                 </a:solidFill>
-                <a:latin typeface="Microsoft YaHei"/>
-                <a:ea typeface="Microsoft YaHei"/>
-                <a:cs typeface="Microsoft YaHei"/>
-              </a:rPr>
-              <a:t>阻塞等待</a:t>
+                <a:latin typeface="Arial"/>
+                <a:ea typeface="Microsoft YaHei"/>
+                <a:cs typeface="Microsoft YaHei"/>
+              </a:rPr>
+              <a:t>Blocking wait</a:t>
             </a:r>
             <a:endParaRPr lang="zh-CN" sz="1200"/>
           </a:p>
@@ -12401,15 +12401,15 @@
           <a:p>
             <a:pPr algn="l"/>
             <a:r>
-              <a:rPr lang="zh-CN" sz="1150">
+              <a:rPr lang="zh-CN" sz="1115">
                 <a:solidFill>
                   <a:srgbClr val="111820"/>
                 </a:solidFill>
-                <a:latin typeface="Microsoft YaHei"/>
-                <a:ea typeface="Microsoft YaHei"/>
-                <a:cs typeface="Microsoft YaHei"/>
-              </a:rPr>
-              <a:t>H=12 / R=4 / B=3；推理耗时假设为 2 个示意单位，不代表实测性能。</a:t>
+                <a:latin typeface="Arial"/>
+                <a:ea typeface="Microsoft YaHei"/>
+                <a:cs typeface="Microsoft YaHei"/>
+              </a:rPr>
+              <a:t>H=12 / R=4 / B=3. Inference takes 2 illustrative units; timings are not measured.</a:t>
             </a:r>
             <a:endParaRPr lang="zh-CN" sz="1150"/>
           </a:p>
@@ -12442,15 +12442,15 @@
           <a:p>
             <a:pPr algn="l"/>
             <a:r>
-              <a:rPr lang="zh-CN" sz="1150">
+              <a:rPr lang="zh-CN" sz="1115">
                 <a:solidFill>
                   <a:srgbClr val="111820"/>
                 </a:solidFill>
-                <a:latin typeface="Microsoft YaHei"/>
-                <a:ea typeface="Microsoft YaHei"/>
-                <a:cs typeface="Microsoft YaHei"/>
-              </a:rPr>
-              <a:t>按实际控制步裁剪；缓冲为空时零手臂增量并保持夹爪。本例未触发缓冲耗尽。</a:t>
+                <a:latin typeface="Arial"/>
+                <a:ea typeface="Microsoft YaHei"/>
+                <a:cs typeface="Microsoft YaHei"/>
+              </a:rPr>
+              <a:t>Trim by executed steps. Empty buffer: zero arm increments, retain gripper. No depletion in this example.</a:t>
             </a:r>
             <a:endParaRPr lang="zh-CN" sz="1150"/>
           </a:p>
